--- a/incidenti_datascience.pptx
+++ b/incidenti_datascience.pptx
@@ -5,14 +5,16 @@
     <p:sldMasterId id="2147483648" r:id="rId1"/>
   </p:sldMasterIdLst>
   <p:notesMasterIdLst>
-    <p:notesMasterId r:id="rId7"/>
+    <p:notesMasterId r:id="rId9"/>
   </p:notesMasterIdLst>
   <p:sldIdLst>
     <p:sldId id="256" r:id="rId2"/>
     <p:sldId id="257" r:id="rId3"/>
-    <p:sldId id="258" r:id="rId4"/>
-    <p:sldId id="264" r:id="rId5"/>
-    <p:sldId id="263" r:id="rId6"/>
+    <p:sldId id="266" r:id="rId4"/>
+    <p:sldId id="258" r:id="rId5"/>
+    <p:sldId id="264" r:id="rId6"/>
+    <p:sldId id="265" r:id="rId7"/>
+    <p:sldId id="263" r:id="rId8"/>
   </p:sldIdLst>
   <p:sldSz cx="9144000" cy="5143500" type="screen16x9"/>
   <p:notesSz cx="5143500" cy="9144000"/>
@@ -428,6 +430,153 @@
       </p:grpSpPr>
       <p:sp>
         <p:nvSpPr>
+          <p:cNvPr id="2" name="Segnaposto immagine diapositiva 1"/>
+          <p:cNvSpPr>
+            <a:spLocks noGrp="1" noRot="1" noChangeAspect="1"/>
+          </p:cNvSpPr>
+          <p:nvPr>
+            <p:ph type="sldImg"/>
+          </p:nvPr>
+        </p:nvSpPr>
+        <p:spPr>
+          <a:xfrm>
+            <a:off x="-171450" y="1143000"/>
+            <a:ext cx="5486400" cy="3086100"/>
+          </a:xfrm>
+          <a:prstGeom prst="rect">
+            <a:avLst/>
+          </a:prstGeom>
+          <a:noFill/>
+          <a:ln w="12700">
+            <a:solidFill>
+              <a:prstClr val="black"/>
+            </a:solidFill>
+          </a:ln>
+        </p:spPr>
+      </p:sp>
+      <p:sp>
+        <p:nvSpPr>
+          <p:cNvPr id="3" name="Segnaposto note 2"/>
+          <p:cNvSpPr>
+            <a:spLocks noGrp="1"/>
+          </p:cNvSpPr>
+          <p:nvPr>
+            <p:ph type="body" idx="1"/>
+          </p:nvPr>
+        </p:nvSpPr>
+        <p:spPr>
+          <a:xfrm>
+            <a:off x="514350" y="4400550"/>
+            <a:ext cx="4114800" cy="3600450"/>
+          </a:xfrm>
+          <a:prstGeom prst="rect">
+            <a:avLst/>
+          </a:prstGeom>
+        </p:spPr>
+        <p:txBody>
+          <a:bodyPr/>
+          <a:lstStyle/>
+          <a:p>
+            <a:pPr marL="0" marR="0" lvl="0" indent="0" algn="l" defTabSz="914400" rtl="0" eaLnBrk="1" fontAlgn="auto" latinLnBrk="0" hangingPunct="1">
+              <a:lnSpc>
+                <a:spcPct val="100000"/>
+              </a:lnSpc>
+              <a:spcBef>
+                <a:spcPts val="0"/>
+              </a:spcBef>
+              <a:spcAft>
+                <a:spcPts val="0"/>
+              </a:spcAft>
+              <a:buClrTx/>
+              <a:buSzTx/>
+              <a:buFontTx/>
+              <a:buNone/>
+              <a:tabLst/>
+              <a:defRPr/>
+            </a:pPr>
+            <a:r>
+              <a:rPr lang="en-US" dirty="0" err="1"/>
+              <a:t>grafico</a:t>
+            </a:r>
+            <a:r>
+              <a:rPr lang="en-US" dirty="0"/>
+              <a:t> a torta utile, circa 3 </a:t>
+            </a:r>
+            <a:r>
+              <a:rPr lang="en-US" dirty="0" err="1"/>
+              <a:t>incidenti</a:t>
+            </a:r>
+            <a:r>
+              <a:rPr lang="en-US" dirty="0"/>
+              <a:t> </a:t>
+            </a:r>
+            <a:r>
+              <a:rPr lang="en-US" dirty="0" err="1"/>
+              <a:t>mortali</a:t>
+            </a:r>
+            <a:r>
+              <a:rPr lang="en-US" dirty="0"/>
+              <a:t> </a:t>
+            </a:r>
+            <a:r>
+              <a:rPr lang="en-US" dirty="0" err="1"/>
+              <a:t>all'anno</a:t>
+            </a:r>
+            <a:r>
+              <a:rPr lang="en-US" dirty="0"/>
+              <a:t> o un </a:t>
+            </a:r>
+            <a:r>
+              <a:rPr lang="en-US" dirty="0" err="1"/>
+              <a:t>grafico</a:t>
+            </a:r>
+            <a:r>
+              <a:rPr lang="en-US" dirty="0"/>
+              <a:t> simile da </a:t>
+            </a:r>
+            <a:r>
+              <a:rPr lang="en-US" dirty="0" err="1"/>
+              <a:t>esporre</a:t>
+            </a:r>
+            <a:endParaRPr lang="en-US" dirty="0"/>
+          </a:p>
+          <a:p>
+            <a:endParaRPr lang="it-CH" dirty="0"/>
+          </a:p>
+        </p:txBody>
+      </p:sp>
+    </p:spTree>
+    <p:extLst>
+      <p:ext uri="{BB962C8B-B14F-4D97-AF65-F5344CB8AC3E}">
+        <p14:creationId xmlns:p14="http://schemas.microsoft.com/office/powerpoint/2010/main" val="3757069579"/>
+      </p:ext>
+    </p:extLst>
+  </p:cSld>
+  <p:clrMapOvr>
+    <a:masterClrMapping/>
+  </p:clrMapOvr>
+</p:notes>
+</file>
+
+<file path=ppt/notesSlides/notesSlide4.xml><?xml version="1.0" encoding="utf-8"?>
+<p:notes xmlns:a="http://schemas.openxmlformats.org/drawingml/2006/main" xmlns:r="http://schemas.openxmlformats.org/officeDocument/2006/relationships" xmlns:p="http://schemas.openxmlformats.org/presentationml/2006/main">
+  <p:cSld>
+    <p:spTree>
+      <p:nvGrpSpPr>
+        <p:cNvPr id="1" name=""/>
+        <p:cNvGrpSpPr/>
+        <p:nvPr/>
+      </p:nvGrpSpPr>
+      <p:grpSpPr>
+        <a:xfrm>
+          <a:off x="0" y="0"/>
+          <a:ext cx="0" cy="0"/>
+          <a:chOff x="0" y="0"/>
+          <a:chExt cx="0" cy="0"/>
+        </a:xfrm>
+      </p:grpSpPr>
+      <p:sp>
+        <p:nvSpPr>
           <p:cNvPr id="2" name="Slide Image Placeholder 1"/>
           <p:cNvSpPr>
             <a:spLocks noGrp="1" noRot="1" noChangeAspect="1"/>
@@ -474,7 +623,7 @@
           <a:p>
             <a:fld id="{F7021451-1387-4CA6-816F-3879F97B5CBC}" type="slidenum">
               <a:rPr lang="en-US"/>
-              <a:t>3</a:t>
+              <a:t>4</a:t>
             </a:fld>
             <a:endParaRPr lang="en-US"/>
           </a:p>
@@ -493,7 +642,7 @@
 </p:notes>
 </file>
 
-<file path=ppt/notesSlides/notesSlide4.xml><?xml version="1.0" encoding="utf-8"?>
+<file path=ppt/notesSlides/notesSlide5.xml><?xml version="1.0" encoding="utf-8"?>
 <p:notes xmlns:a="http://schemas.openxmlformats.org/drawingml/2006/main" xmlns:r="http://schemas.openxmlformats.org/officeDocument/2006/relationships" xmlns:p="http://schemas.openxmlformats.org/presentationml/2006/main">
   <p:cSld>
     <p:spTree>
@@ -582,7 +731,7 @@
           <a:p>
             <a:fld id="{F7021451-1387-4CA6-816F-3879F97B5CBC}" type="slidenum">
               <a:rPr lang="en-US"/>
-              <a:t>4</a:t>
+              <a:t>5</a:t>
             </a:fld>
             <a:endParaRPr lang="en-US"/>
           </a:p>
@@ -601,7 +750,274 @@
 </p:notes>
 </file>
 
-<file path=ppt/notesSlides/notesSlide5.xml><?xml version="1.0" encoding="utf-8"?>
+<file path=ppt/notesSlides/notesSlide6.xml><?xml version="1.0" encoding="utf-8"?>
+<p:notes xmlns:a="http://schemas.openxmlformats.org/drawingml/2006/main" xmlns:r="http://schemas.openxmlformats.org/officeDocument/2006/relationships" xmlns:p="http://schemas.openxmlformats.org/presentationml/2006/main">
+  <p:cSld>
+    <p:spTree>
+      <p:nvGrpSpPr>
+        <p:cNvPr id="1" name="">
+          <a:extLst>
+            <a:ext uri="{FF2B5EF4-FFF2-40B4-BE49-F238E27FC236}">
+              <a16:creationId xmlns:a16="http://schemas.microsoft.com/office/drawing/2014/main" id="{8D82FD92-27CF-58EE-3DE1-59E89ACBD336}"/>
+            </a:ext>
+          </a:extLst>
+        </p:cNvPr>
+        <p:cNvGrpSpPr/>
+        <p:nvPr/>
+      </p:nvGrpSpPr>
+      <p:grpSpPr>
+        <a:xfrm>
+          <a:off x="0" y="0"/>
+          <a:ext cx="0" cy="0"/>
+          <a:chOff x="0" y="0"/>
+          <a:chExt cx="0" cy="0"/>
+        </a:xfrm>
+      </p:grpSpPr>
+      <p:sp>
+        <p:nvSpPr>
+          <p:cNvPr id="2" name="Slide Image Placeholder 1">
+            <a:extLst>
+              <a:ext uri="{FF2B5EF4-FFF2-40B4-BE49-F238E27FC236}">
+                <a16:creationId xmlns:a16="http://schemas.microsoft.com/office/drawing/2014/main" id="{0C35497A-7749-56C1-3F93-6FA02ABA6440}"/>
+              </a:ext>
+            </a:extLst>
+          </p:cNvPr>
+          <p:cNvSpPr>
+            <a:spLocks noGrp="1" noRot="1" noChangeAspect="1"/>
+          </p:cNvSpPr>
+          <p:nvPr>
+            <p:ph type="sldImg"/>
+          </p:nvPr>
+        </p:nvSpPr>
+        <p:spPr/>
+      </p:sp>
+      <p:sp>
+        <p:nvSpPr>
+          <p:cNvPr id="3" name="Notes Placeholder 2">
+            <a:extLst>
+              <a:ext uri="{FF2B5EF4-FFF2-40B4-BE49-F238E27FC236}">
+                <a16:creationId xmlns:a16="http://schemas.microsoft.com/office/drawing/2014/main" id="{A36F1386-6F4D-D442-A0CE-ABFB8E2FA828}"/>
+              </a:ext>
+            </a:extLst>
+          </p:cNvPr>
+          <p:cNvSpPr>
+            <a:spLocks noGrp="1"/>
+          </p:cNvSpPr>
+          <p:nvPr>
+            <p:ph type="body" idx="1"/>
+          </p:nvPr>
+        </p:nvSpPr>
+        <p:spPr/>
+        <p:txBody>
+          <a:bodyPr/>
+          <a:lstStyle/>
+          <a:p>
+            <a:r>
+              <a:rPr lang="en-US" dirty="0"/>
+              <a:t>1. </a:t>
+            </a:r>
+            <a:r>
+              <a:rPr lang="en-US" dirty="0" err="1"/>
+              <a:t>Geoscatter</a:t>
+            </a:r>
+            <a:r>
+              <a:rPr lang="en-US" dirty="0"/>
+              <a:t> </a:t>
+            </a:r>
+          </a:p>
+          <a:p>
+            <a:r>
+              <a:rPr lang="en-US" dirty="0"/>
+              <a:t>2. Ultima </a:t>
+            </a:r>
+            <a:r>
+              <a:rPr lang="en-US" dirty="0" err="1"/>
+              <a:t>cosa</a:t>
+            </a:r>
+            <a:r>
+              <a:rPr lang="en-US" dirty="0"/>
+              <a:t> </a:t>
+            </a:r>
+            <a:r>
+              <a:rPr lang="en-US" dirty="0" err="1"/>
+              <a:t>facoltativa</a:t>
+            </a:r>
+            <a:r>
+              <a:rPr lang="en-US" dirty="0"/>
+              <a:t>:</a:t>
+            </a:r>
+            <a:br>
+              <a:rPr lang="en-US" dirty="0"/>
+            </a:br>
+            <a:r>
+              <a:rPr lang="en-US" dirty="0" err="1"/>
+              <a:t>scaricare</a:t>
+            </a:r>
+            <a:r>
+              <a:rPr lang="en-US" dirty="0"/>
+              <a:t> da </a:t>
+            </a:r>
+            <a:r>
+              <a:rPr lang="en-US" dirty="0" err="1"/>
+              <a:t>meteoswiss</a:t>
+            </a:r>
+            <a:r>
+              <a:rPr lang="en-US" dirty="0"/>
+              <a:t> le temperature a </a:t>
+            </a:r>
+            <a:r>
+              <a:rPr lang="en-US" dirty="0" err="1"/>
+              <a:t>basilea</a:t>
+            </a:r>
+            <a:r>
+              <a:rPr lang="en-US" dirty="0"/>
+              <a:t> </a:t>
+            </a:r>
+            <a:r>
+              <a:rPr lang="en-US" dirty="0" err="1"/>
+              <a:t>città</a:t>
+            </a:r>
+            <a:r>
+              <a:rPr lang="en-US" dirty="0"/>
+              <a:t>, </a:t>
+            </a:r>
+            <a:r>
+              <a:rPr lang="en-US" dirty="0" err="1"/>
+              <a:t>vediamo</a:t>
+            </a:r>
+            <a:r>
+              <a:rPr lang="en-US" dirty="0"/>
+              <a:t> </a:t>
+            </a:r>
+            <a:r>
+              <a:rPr lang="en-US" dirty="0" err="1"/>
+              <a:t>i</a:t>
+            </a:r>
+            <a:r>
+              <a:rPr lang="en-US" dirty="0"/>
+              <a:t> </a:t>
+            </a:r>
+            <a:r>
+              <a:rPr lang="en-US" dirty="0" err="1"/>
+              <a:t>giorni</a:t>
+            </a:r>
+            <a:r>
+              <a:rPr lang="en-US" dirty="0"/>
+              <a:t> di neve e </a:t>
+            </a:r>
+            <a:r>
+              <a:rPr lang="en-US" dirty="0" err="1"/>
+              <a:t>facciamo</a:t>
+            </a:r>
+            <a:r>
+              <a:rPr lang="en-US" dirty="0"/>
+              <a:t> </a:t>
+            </a:r>
+            <a:r>
+              <a:rPr lang="en-US" dirty="0" err="1"/>
+              <a:t>un'analisi</a:t>
+            </a:r>
+            <a:r>
+              <a:rPr lang="en-US" dirty="0"/>
+              <a:t> con neve/</a:t>
+            </a:r>
+            <a:r>
+              <a:rPr lang="en-US" dirty="0" err="1"/>
+              <a:t>incidenti</a:t>
+            </a:r>
+            <a:endParaRPr lang="en-US" dirty="0"/>
+          </a:p>
+          <a:p>
+            <a:r>
+              <a:rPr lang="en-US" dirty="0"/>
+              <a:t>3. </a:t>
+            </a:r>
+            <a:r>
+              <a:rPr lang="en-US" dirty="0" err="1"/>
+              <a:t>può</a:t>
+            </a:r>
+            <a:r>
+              <a:rPr lang="en-US" dirty="0"/>
+              <a:t> </a:t>
+            </a:r>
+            <a:r>
+              <a:rPr lang="en-US" dirty="0" err="1"/>
+              <a:t>essere</a:t>
+            </a:r>
+            <a:r>
+              <a:rPr lang="en-US" dirty="0"/>
+              <a:t> </a:t>
+            </a:r>
+            <a:r>
+              <a:rPr lang="en-US" dirty="0" err="1"/>
+              <a:t>dovuto</a:t>
+            </a:r>
+            <a:r>
+              <a:rPr lang="en-US" dirty="0"/>
+              <a:t> </a:t>
+            </a:r>
+            <a:r>
+              <a:rPr lang="en-US" dirty="0" err="1"/>
+              <a:t>anche</a:t>
+            </a:r>
+            <a:r>
+              <a:rPr lang="en-US" dirty="0"/>
+              <a:t> a piu ore di </a:t>
+            </a:r>
+            <a:r>
+              <a:rPr lang="en-US" dirty="0" err="1"/>
+              <a:t>buio</a:t>
+            </a:r>
+            <a:endParaRPr lang="en-US" dirty="0"/>
+          </a:p>
+          <a:p>
+            <a:endParaRPr lang="en-US" dirty="0"/>
+          </a:p>
+        </p:txBody>
+      </p:sp>
+      <p:sp>
+        <p:nvSpPr>
+          <p:cNvPr id="4" name="Slide Number Placeholder 3">
+            <a:extLst>
+              <a:ext uri="{FF2B5EF4-FFF2-40B4-BE49-F238E27FC236}">
+                <a16:creationId xmlns:a16="http://schemas.microsoft.com/office/drawing/2014/main" id="{732B74B5-845D-99BD-49C4-47A56B1861AF}"/>
+              </a:ext>
+            </a:extLst>
+          </p:cNvPr>
+          <p:cNvSpPr>
+            <a:spLocks noGrp="1"/>
+          </p:cNvSpPr>
+          <p:nvPr>
+            <p:ph type="sldNum" sz="quarter" idx="10"/>
+          </p:nvPr>
+        </p:nvSpPr>
+        <p:spPr/>
+        <p:txBody>
+          <a:bodyPr/>
+          <a:lstStyle/>
+          <a:p>
+            <a:fld id="{F7021451-1387-4CA6-816F-3879F97B5CBC}" type="slidenum">
+              <a:rPr lang="en-US"/>
+              <a:t>6</a:t>
+            </a:fld>
+            <a:endParaRPr lang="en-US"/>
+          </a:p>
+        </p:txBody>
+      </p:sp>
+    </p:spTree>
+    <p:extLst>
+      <p:ext uri="{BB962C8B-B14F-4D97-AF65-F5344CB8AC3E}">
+        <p14:creationId xmlns:p14="http://schemas.microsoft.com/office/powerpoint/2010/main" val="531183477"/>
+      </p:ext>
+    </p:extLst>
+  </p:cSld>
+  <p:clrMapOvr>
+    <a:masterClrMapping/>
+  </p:clrMapOvr>
+</p:notes>
+</file>
+
+<file path=ppt/notesSlides/notesSlide7.xml><?xml version="1.0" encoding="utf-8"?>
 <p:notes xmlns:a="http://schemas.openxmlformats.org/drawingml/2006/main" xmlns:r="http://schemas.openxmlformats.org/officeDocument/2006/relationships" xmlns:p="http://schemas.openxmlformats.org/presentationml/2006/main">
   <p:cSld>
     <p:spTree>
@@ -666,7 +1082,7 @@
           <a:p>
             <a:fld id="{F7021451-1387-4CA6-816F-3879F97B5CBC}" type="slidenum">
               <a:rPr lang="en-US"/>
-              <a:t>5</a:t>
+              <a:t>7</a:t>
             </a:fld>
             <a:endParaRPr lang="en-US"/>
           </a:p>
@@ -1084,7 +1500,19 @@
               </a:rPr>
               <a:t>Analisi degli Incidenti Stradali</a:t>
             </a:r>
-            <a:endParaRPr lang="it-IT" sz="3800" noProof="1"/>
+          </a:p>
+          <a:p>
+            <a:pPr algn="ctr"/>
+            <a:r>
+              <a:rPr lang="it-IT" noProof="1">
+                <a:solidFill>
+                  <a:schemeClr val="bg1">
+                    <a:lumMod val="85000"/>
+                  </a:schemeClr>
+                </a:solidFill>
+              </a:rPr>
+              <a:t>Cantone Basilea Città - opendata.swiss</a:t>
+            </a:r>
           </a:p>
         </p:txBody>
       </p:sp>
@@ -1209,7 +1637,7 @@
                   <a:srgbClr val="9BA3C2"/>
                 </a:solidFill>
               </a:rPr>
-              <a:t>Dataset: Incidenti stradali – 11.383 record  |  2011 – 2024  |  13 variabili</a:t>
+              <a:t>Dataset: Incidenti stradali –  2011 – 2024 </a:t>
             </a:r>
             <a:endParaRPr lang="it-IT" sz="1300" noProof="1"/>
           </a:p>
@@ -1704,7 +2132,7 @@
                   <a:srgbClr val="E8ECF4"/>
                 </a:solidFill>
               </a:rPr>
-              <a:t>📍  Coordinate geografiche (Geo Point)</a:t>
+              <a:t>📍  Coordinate geografiche </a:t>
             </a:r>
             <a:endParaRPr lang="it-IT" sz="1200" noProof="1"/>
           </a:p>
@@ -1791,7 +2219,7 @@
         <p:spPr>
           <a:xfrm>
             <a:off x="502920" y="2633472"/>
-            <a:ext cx="3657600" cy="329184"/>
+            <a:ext cx="3749040" cy="329184"/>
           </a:xfrm>
           <a:prstGeom prst="rect">
             <a:avLst/>
@@ -1812,7 +2240,7 @@
                   <a:srgbClr val="E8ECF4"/>
                 </a:solidFill>
               </a:rPr>
-              <a:t>⚠️  Gravità (Feriti gravi → Morti)</a:t>
+              <a:t>⚠️  Gravità (Nessun ferito / Feriti lievi - gravi / Morti)</a:t>
             </a:r>
             <a:endParaRPr lang="it-IT" sz="1200" noProof="1"/>
           </a:p>
@@ -2529,6 +2957,36 @@
 </file>
 
 <file path=ppt/slides/slide3.xml><?xml version="1.0" encoding="utf-8"?>
+<p:sld xmlns:a="http://schemas.openxmlformats.org/drawingml/2006/main" xmlns:r="http://schemas.openxmlformats.org/officeDocument/2006/relationships" xmlns:p="http://schemas.openxmlformats.org/presentationml/2006/main">
+  <p:cSld>
+    <p:spTree>
+      <p:nvGrpSpPr>
+        <p:cNvPr id="1" name=""/>
+        <p:cNvGrpSpPr/>
+        <p:nvPr/>
+      </p:nvGrpSpPr>
+      <p:grpSpPr>
+        <a:xfrm>
+          <a:off x="0" y="0"/>
+          <a:ext cx="0" cy="0"/>
+          <a:chOff x="0" y="0"/>
+          <a:chExt cx="0" cy="0"/>
+        </a:xfrm>
+      </p:grpSpPr>
+    </p:spTree>
+    <p:extLst>
+      <p:ext uri="{BB962C8B-B14F-4D97-AF65-F5344CB8AC3E}">
+        <p14:creationId xmlns:p14="http://schemas.microsoft.com/office/powerpoint/2010/main" val="2315645209"/>
+      </p:ext>
+    </p:extLst>
+  </p:cSld>
+  <p:clrMapOvr>
+    <a:masterClrMapping/>
+  </p:clrMapOvr>
+</p:sld>
+</file>
+
+<file path=ppt/slides/slide4.xml><?xml version="1.0" encoding="utf-8"?>
 <p:sld xmlns:a="http://schemas.openxmlformats.org/drawingml/2006/main" xmlns:r="http://schemas.openxmlformats.org/officeDocument/2006/relationships" xmlns:p="http://schemas.openxmlformats.org/presentationml/2006/main">
   <p:cSld name="Slide 3">
     <p:bg>
@@ -2610,7 +3068,7 @@
                   <a:srgbClr val="FFFFFF"/>
                 </a:solidFill>
               </a:rPr>
-              <a:t>Perché è un Ottimo Dataset per Data Science?</a:t>
+              <a:t>Perché è un Ottimo Dataset?</a:t>
             </a:r>
             <a:endParaRPr lang="it-IT" sz="2400" noProof="1"/>
           </a:p>
@@ -2695,14 +3153,14 @@
               <a:buNone/>
             </a:pPr>
             <a:r>
-              <a:rPr lang="it-IT" sz="1300" b="1" noProof="1">
+              <a:rPr lang="it-IT" b="1" noProof="1">
                 <a:solidFill>
                   <a:srgbClr val="F2C14E"/>
                 </a:solidFill>
               </a:rPr>
-              <a:t>🔢  Ricco &amp; Reale</a:t>
-            </a:r>
-            <a:endParaRPr lang="it-IT" sz="1300" noProof="1"/>
+              <a:t> Ricco &amp; Reale</a:t>
+            </a:r>
+            <a:endParaRPr lang="it-IT" noProof="1"/>
           </a:p>
         </p:txBody>
       </p:sp>
@@ -2731,14 +3189,29 @@
               <a:buNone/>
             </a:pPr>
             <a:r>
-              <a:rPr lang="it-IT" sz="1050" noProof="1">
+              <a:rPr lang="it-IT" sz="1400" noProof="1">
                 <a:solidFill>
                   <a:srgbClr val="E8ECF4"/>
                 </a:solidFill>
               </a:rPr>
-              <a:t>11.000+ record reali su 14 anni. Senza rischi di scarsità di dati.</a:t>
-            </a:r>
-            <a:endParaRPr lang="it-IT" sz="1050" noProof="1"/>
+              <a:t>11.000+ record reali su 14 anni. </a:t>
+            </a:r>
+            <a:br>
+              <a:rPr lang="it-IT" sz="1400" noProof="1">
+                <a:solidFill>
+                  <a:srgbClr val="E8ECF4"/>
+                </a:solidFill>
+              </a:rPr>
+            </a:br>
+            <a:r>
+              <a:rPr lang="it-IT" sz="1400" noProof="1">
+                <a:solidFill>
+                  <a:srgbClr val="E8ECF4"/>
+                </a:solidFill>
+              </a:rPr>
+              <a:t>Senza rischi di scarsità di dati.</a:t>
+            </a:r>
+            <a:endParaRPr lang="it-IT" sz="1400" noProof="1"/>
           </a:p>
         </p:txBody>
       </p:sp>
@@ -2821,14 +3294,14 @@
               <a:buNone/>
             </a:pPr>
             <a:r>
-              <a:rPr lang="it-IT" sz="1300" b="1" noProof="1">
+              <a:rPr lang="it-IT" b="1" noProof="1">
                 <a:solidFill>
                   <a:srgbClr val="F2C14E"/>
                 </a:solidFill>
               </a:rPr>
-              <a:t>🗂️  Multi-Dimensionale</a:t>
-            </a:r>
-            <a:endParaRPr lang="it-IT" sz="1300" noProof="1"/>
+              <a:t> Multi-Dimensionale</a:t>
+            </a:r>
+            <a:endParaRPr lang="it-IT" noProof="1"/>
           </a:p>
         </p:txBody>
       </p:sp>
@@ -2857,14 +3330,14 @@
               <a:buNone/>
             </a:pPr>
             <a:r>
-              <a:rPr lang="it-IT" sz="1050" noProof="1">
+              <a:rPr lang="it-IT" sz="1400" noProof="1">
                 <a:solidFill>
                   <a:srgbClr val="E8ECF4"/>
                 </a:solidFill>
               </a:rPr>
               <a:t>Combina dati temporali (ora, giorno, mese, anno), spaziali (coordinate GPS), categoriali e booleani</a:t>
             </a:r>
-            <a:endParaRPr lang="it-IT" sz="1050" noProof="1"/>
+            <a:endParaRPr lang="it-IT" sz="1400" noProof="1"/>
           </a:p>
         </p:txBody>
       </p:sp>
@@ -2947,14 +3420,14 @@
               <a:buNone/>
             </a:pPr>
             <a:r>
-              <a:rPr lang="it-IT" sz="1300" b="1" noProof="1">
+              <a:rPr lang="it-IT" b="1" noProof="1">
                 <a:solidFill>
                   <a:srgbClr val="F2C14E"/>
                 </a:solidFill>
               </a:rPr>
-              <a:t>🌍  Dati Geografici</a:t>
-            </a:r>
-            <a:endParaRPr lang="it-IT" sz="1300" noProof="1"/>
+              <a:t> Dati Geografici</a:t>
+            </a:r>
+            <a:endParaRPr lang="it-IT" noProof="1"/>
           </a:p>
         </p:txBody>
       </p:sp>
@@ -2983,7 +3456,7 @@
               <a:buNone/>
             </a:pPr>
             <a:r>
-              <a:rPr lang="it-IT" sz="1050" noProof="1">
+              <a:rPr lang="it-IT" sz="1400" noProof="1">
                 <a:solidFill>
                   <a:srgbClr val="E8ECF4"/>
                 </a:solidFill>
@@ -2991,21 +3464,21 @@
               <a:t>Le coordinate GPS aprono a visualizzazioni su mappa e modelli spaziali </a:t>
             </a:r>
             <a:br>
-              <a:rPr lang="it-IT" sz="1050" noProof="1">
+              <a:rPr lang="it-IT" sz="1400" noProof="1">
                 <a:solidFill>
                   <a:srgbClr val="E8ECF4"/>
                 </a:solidFill>
               </a:rPr>
             </a:br>
             <a:r>
-              <a:rPr lang="it-IT" sz="1050" noProof="1">
+              <a:rPr lang="it-IT" sz="1400" noProof="1">
                 <a:solidFill>
                   <a:srgbClr val="E8ECF4"/>
                 </a:solidFill>
               </a:rPr>
               <a:t>— es. zone più pericolose.</a:t>
             </a:r>
-            <a:endParaRPr lang="it-IT" sz="1050" noProof="1"/>
+            <a:endParaRPr lang="it-IT" sz="1400" noProof="1"/>
           </a:p>
         </p:txBody>
       </p:sp>
@@ -3088,14 +3561,14 @@
               <a:buNone/>
             </a:pPr>
             <a:r>
-              <a:rPr lang="it-IT" sz="1300" b="1" noProof="1">
+              <a:rPr lang="it-IT" b="1" noProof="1">
                 <a:solidFill>
                   <a:srgbClr val="F2C14E"/>
                 </a:solidFill>
               </a:rPr>
-              <a:t>📈  Serie Temporale</a:t>
-            </a:r>
-            <a:endParaRPr lang="it-IT" sz="1300" noProof="1"/>
+              <a:t> Serie Temporale</a:t>
+            </a:r>
+            <a:endParaRPr lang="it-IT" noProof="1"/>
           </a:p>
         </p:txBody>
       </p:sp>
@@ -3124,14 +3597,14 @@
               <a:buNone/>
             </a:pPr>
             <a:r>
-              <a:rPr lang="it-IT" sz="1050" noProof="1">
+              <a:rPr lang="it-IT" sz="1400" noProof="1">
                 <a:solidFill>
                   <a:srgbClr val="E8ECF4"/>
                 </a:solidFill>
               </a:rPr>
               <a:t>14 anni di dati permettono analisi di trend, stagionalità, e correlazioni con eventi esterni (COVID-19, lockdown 2020–21).</a:t>
             </a:r>
-            <a:endParaRPr lang="it-IT" sz="1050" noProof="1"/>
+            <a:endParaRPr lang="it-IT" sz="1400" noProof="1"/>
           </a:p>
         </p:txBody>
       </p:sp>
@@ -3143,7 +3616,7 @@
 </p:sld>
 </file>
 
-<file path=ppt/slides/slide4.xml><?xml version="1.0" encoding="utf-8"?>
+<file path=ppt/slides/slide5.xml><?xml version="1.0" encoding="utf-8"?>
 <p:sld xmlns:a="http://schemas.openxmlformats.org/drawingml/2006/main" xmlns:r="http://schemas.openxmlformats.org/officeDocument/2006/relationships" xmlns:p="http://schemas.openxmlformats.org/presentationml/2006/main">
   <p:cSld>
     <p:spTree>
@@ -3296,8 +3769,8 @@
         </p:blipFill>
         <p:spPr>
           <a:xfrm>
-            <a:off x="1338543" y="942739"/>
-            <a:ext cx="6466913" cy="3855972"/>
+            <a:off x="751306" y="685800"/>
+            <a:ext cx="7641388" cy="4556266"/>
           </a:xfrm>
           <a:prstGeom prst="rect">
             <a:avLst/>
@@ -3317,7 +3790,300 @@
 </p:sld>
 </file>
 
-<file path=ppt/slides/slide5.xml><?xml version="1.0" encoding="utf-8"?>
+<file path=ppt/slides/slide6.xml><?xml version="1.0" encoding="utf-8"?>
+<p:sld xmlns:a="http://schemas.openxmlformats.org/drawingml/2006/main" xmlns:r="http://schemas.openxmlformats.org/officeDocument/2006/relationships" xmlns:p="http://schemas.openxmlformats.org/presentationml/2006/main">
+  <p:cSld>
+    <p:spTree>
+      <p:nvGrpSpPr>
+        <p:cNvPr id="1" name="">
+          <a:extLst>
+            <a:ext uri="{FF2B5EF4-FFF2-40B4-BE49-F238E27FC236}">
+              <a16:creationId xmlns:a16="http://schemas.microsoft.com/office/drawing/2014/main" id="{5A9CF13F-7885-F3E1-F9A2-B05BD0F459CF}"/>
+            </a:ext>
+          </a:extLst>
+        </p:cNvPr>
+        <p:cNvGrpSpPr/>
+        <p:nvPr/>
+      </p:nvGrpSpPr>
+      <p:grpSpPr>
+        <a:xfrm>
+          <a:off x="0" y="0"/>
+          <a:ext cx="0" cy="0"/>
+          <a:chOff x="0" y="0"/>
+          <a:chExt cx="0" cy="0"/>
+        </a:xfrm>
+      </p:grpSpPr>
+      <p:sp>
+        <p:nvSpPr>
+          <p:cNvPr id="14" name="Shape 0">
+            <a:extLst>
+              <a:ext uri="{FF2B5EF4-FFF2-40B4-BE49-F238E27FC236}">
+                <a16:creationId xmlns:a16="http://schemas.microsoft.com/office/drawing/2014/main" id="{C7697264-9901-8C10-0A87-5B798ED2289A}"/>
+              </a:ext>
+            </a:extLst>
+          </p:cNvPr>
+          <p:cNvSpPr>
+            <a:spLocks noGrp="1" noRot="1" noMove="1" noResize="1" noEditPoints="1" noAdjustHandles="1" noChangeArrowheads="1" noChangeShapeType="1"/>
+          </p:cNvSpPr>
+          <p:nvPr/>
+        </p:nvSpPr>
+        <p:spPr>
+          <a:xfrm>
+            <a:off x="-1" y="621792"/>
+            <a:ext cx="9144000" cy="4615226"/>
+          </a:xfrm>
+          <a:prstGeom prst="rect">
+            <a:avLst/>
+          </a:prstGeom>
+          <a:solidFill>
+            <a:srgbClr val="191F3A"/>
+          </a:solidFill>
+          <a:ln/>
+        </p:spPr>
+        <p:txBody>
+          <a:bodyPr/>
+          <a:lstStyle/>
+          <a:p>
+            <a:endParaRPr lang="it-IT" noProof="1"/>
+          </a:p>
+        </p:txBody>
+      </p:sp>
+      <p:sp>
+        <p:nvSpPr>
+          <p:cNvPr id="2" name="Shape 0">
+            <a:extLst>
+              <a:ext uri="{FF2B5EF4-FFF2-40B4-BE49-F238E27FC236}">
+                <a16:creationId xmlns:a16="http://schemas.microsoft.com/office/drawing/2014/main" id="{DCC890A3-F509-E412-E067-D4DF201C2AD8}"/>
+              </a:ext>
+            </a:extLst>
+          </p:cNvPr>
+          <p:cNvSpPr/>
+          <p:nvPr/>
+        </p:nvSpPr>
+        <p:spPr>
+          <a:xfrm>
+            <a:off x="0" y="0"/>
+            <a:ext cx="9144000" cy="685800"/>
+          </a:xfrm>
+          <a:prstGeom prst="rect">
+            <a:avLst/>
+          </a:prstGeom>
+          <a:solidFill>
+            <a:srgbClr val="252C56"/>
+          </a:solidFill>
+          <a:ln/>
+        </p:spPr>
+        <p:txBody>
+          <a:bodyPr/>
+          <a:lstStyle/>
+          <a:p>
+            <a:endParaRPr lang="it-IT" noProof="1"/>
+          </a:p>
+        </p:txBody>
+      </p:sp>
+      <p:sp>
+        <p:nvSpPr>
+          <p:cNvPr id="3" name="Text 1">
+            <a:extLst>
+              <a:ext uri="{FF2B5EF4-FFF2-40B4-BE49-F238E27FC236}">
+                <a16:creationId xmlns:a16="http://schemas.microsoft.com/office/drawing/2014/main" id="{092F9790-356A-A98F-EE88-3DEFD287B6F5}"/>
+              </a:ext>
+            </a:extLst>
+          </p:cNvPr>
+          <p:cNvSpPr/>
+          <p:nvPr/>
+        </p:nvSpPr>
+        <p:spPr>
+          <a:xfrm>
+            <a:off x="457200" y="73152"/>
+            <a:ext cx="8229600" cy="548640"/>
+          </a:xfrm>
+          <a:prstGeom prst="rect">
+            <a:avLst/>
+          </a:prstGeom>
+          <a:noFill/>
+          <a:ln/>
+        </p:spPr>
+        <p:txBody>
+          <a:bodyPr wrap="square" rtlCol="0" anchor="ctr"/>
+          <a:lstStyle/>
+          <a:p>
+            <a:pPr marL="0" indent="0">
+              <a:buNone/>
+            </a:pPr>
+            <a:r>
+              <a:rPr lang="it-IT" sz="2400" b="1" noProof="1">
+                <a:solidFill>
+                  <a:srgbClr val="FFFFFF"/>
+                </a:solidFill>
+              </a:rPr>
+              <a:t>Possibili analisi future</a:t>
+            </a:r>
+            <a:endParaRPr lang="it-IT" sz="2400" noProof="1"/>
+          </a:p>
+        </p:txBody>
+      </p:sp>
+      <p:sp>
+        <p:nvSpPr>
+          <p:cNvPr id="4" name="CasellaDiTesto 3">
+            <a:extLst>
+              <a:ext uri="{FF2B5EF4-FFF2-40B4-BE49-F238E27FC236}">
+                <a16:creationId xmlns:a16="http://schemas.microsoft.com/office/drawing/2014/main" id="{344068D8-59DA-8A7D-FDE1-07382016367F}"/>
+              </a:ext>
+            </a:extLst>
+          </p:cNvPr>
+          <p:cNvSpPr txBox="1"/>
+          <p:nvPr/>
+        </p:nvSpPr>
+        <p:spPr>
+          <a:xfrm>
+            <a:off x="590549" y="1058918"/>
+            <a:ext cx="7962900" cy="2308324"/>
+          </a:xfrm>
+          <a:prstGeom prst="rect">
+            <a:avLst/>
+          </a:prstGeom>
+          <a:noFill/>
+        </p:spPr>
+        <p:txBody>
+          <a:bodyPr wrap="square" rtlCol="0">
+            <a:spAutoFit/>
+          </a:bodyPr>
+          <a:lstStyle/>
+          <a:p>
+            <a:pPr marL="342900" indent="-342900">
+              <a:buFont typeface="+mj-lt"/>
+              <a:buAutoNum type="arabicPeriod"/>
+            </a:pPr>
+            <a:r>
+              <a:rPr lang="it-CH" dirty="0">
+                <a:solidFill>
+                  <a:schemeClr val="bg1"/>
+                </a:solidFill>
+              </a:rPr>
+              <a:t>DataMaps con relative posizioni d’incidenti </a:t>
+            </a:r>
+            <a:r>
+              <a:rPr lang="it-CH" sz="1200" dirty="0">
+                <a:solidFill>
+                  <a:schemeClr val="bg1">
+                    <a:lumMod val="85000"/>
+                  </a:schemeClr>
+                </a:solidFill>
+              </a:rPr>
+              <a:t>(abbiamo bisogno di aiuto per farlo)</a:t>
+            </a:r>
+          </a:p>
+          <a:p>
+            <a:pPr marL="342900" indent="-342900">
+              <a:buFont typeface="+mj-lt"/>
+              <a:buAutoNum type="arabicPeriod"/>
+            </a:pPr>
+            <a:r>
+              <a:rPr lang="it-CH" dirty="0">
+                <a:solidFill>
+                  <a:schemeClr val="bg1"/>
+                </a:solidFill>
+              </a:rPr>
+              <a:t>Correlazione gravità incidenti </a:t>
+            </a:r>
+            <a:r>
+              <a:rPr lang="it-CH" dirty="0">
+                <a:solidFill>
+                  <a:schemeClr val="bg1"/>
+                </a:solidFill>
+                <a:sym typeface="Wingdings" pitchFamily="2" charset="2"/>
+              </a:rPr>
+              <a:t></a:t>
+            </a:r>
+            <a:r>
+              <a:rPr lang="it-CH" dirty="0">
+                <a:solidFill>
+                  <a:schemeClr val="bg1"/>
+                </a:solidFill>
+              </a:rPr>
+              <a:t> tipo di strada / posizione / moto-bici coinvolte</a:t>
+            </a:r>
+          </a:p>
+          <a:p>
+            <a:pPr marL="342900" indent="-342900">
+              <a:buFont typeface="+mj-lt"/>
+              <a:buAutoNum type="arabicPeriod"/>
+            </a:pPr>
+            <a:r>
+              <a:rPr lang="it-CH" dirty="0">
+                <a:solidFill>
+                  <a:schemeClr val="bg1"/>
+                </a:solidFill>
+              </a:rPr>
+              <a:t>Trend estate/inverno (es. strade più pericolose con la neve)</a:t>
+            </a:r>
+          </a:p>
+          <a:p>
+            <a:pPr marL="342900" indent="-342900">
+              <a:buFont typeface="+mj-lt"/>
+              <a:buAutoNum type="arabicPeriod"/>
+            </a:pPr>
+            <a:endParaRPr lang="it-CH" dirty="0">
+              <a:solidFill>
+                <a:schemeClr val="bg1"/>
+              </a:solidFill>
+            </a:endParaRPr>
+          </a:p>
+          <a:p>
+            <a:r>
+              <a:rPr lang="it-CH" dirty="0">
+                <a:solidFill>
+                  <a:schemeClr val="bg1"/>
+                </a:solidFill>
+              </a:rPr>
+              <a:t>…</a:t>
+            </a:r>
+          </a:p>
+          <a:p>
+            <a:endParaRPr lang="it-CH" dirty="0">
+              <a:solidFill>
+                <a:schemeClr val="bg1"/>
+              </a:solidFill>
+            </a:endParaRPr>
+          </a:p>
+          <a:p>
+            <a:r>
+              <a:rPr lang="it-CH" dirty="0">
+                <a:solidFill>
+                  <a:schemeClr val="bg1"/>
+                </a:solidFill>
+              </a:rPr>
+              <a:t>Consigli? Richieste?</a:t>
+            </a:r>
+          </a:p>
+          <a:p>
+            <a:pPr marL="342900" indent="-342900">
+              <a:buFont typeface="+mj-lt"/>
+              <a:buAutoNum type="arabicPeriod"/>
+            </a:pPr>
+            <a:endParaRPr lang="it-CH" dirty="0">
+              <a:solidFill>
+                <a:schemeClr val="bg1"/>
+              </a:solidFill>
+            </a:endParaRPr>
+          </a:p>
+        </p:txBody>
+      </p:sp>
+    </p:spTree>
+    <p:extLst>
+      <p:ext uri="{BB962C8B-B14F-4D97-AF65-F5344CB8AC3E}">
+        <p14:creationId xmlns:p14="http://schemas.microsoft.com/office/powerpoint/2010/main" val="386528024"/>
+      </p:ext>
+    </p:extLst>
+  </p:cSld>
+  <p:clrMapOvr>
+    <a:masterClrMapping/>
+  </p:clrMapOvr>
+</p:sld>
+</file>
+
+<file path=ppt/slides/slide7.xml><?xml version="1.0" encoding="utf-8"?>
 <p:sld xmlns:a="http://schemas.openxmlformats.org/drawingml/2006/main" xmlns:r="http://schemas.openxmlformats.org/officeDocument/2006/relationships" xmlns:p="http://schemas.openxmlformats.org/presentationml/2006/main">
   <p:cSld name="Slide 8">
     <p:bg>
@@ -3517,7 +4283,7 @@
         </p:nvSpPr>
         <p:spPr>
           <a:xfrm>
-            <a:off x="2286000" y="3154680"/>
+            <a:off x="1828800" y="3104388"/>
             <a:ext cx="5486400" cy="310896"/>
           </a:xfrm>
           <a:prstGeom prst="rect">
@@ -3539,7 +4305,7 @@
                   <a:srgbClr val="E8ECF4"/>
                 </a:solidFill>
               </a:rPr>
-              <a:t>✅  Dataset reale, ricco e multi-dimensionale</a:t>
+              <a:t> Dataset reale, ricco e multi-dimensionale</a:t>
             </a:r>
             <a:endParaRPr lang="it-IT" sz="1300" noProof="1"/>
           </a:p>
@@ -3553,7 +4319,7 @@
         </p:nvSpPr>
         <p:spPr>
           <a:xfrm>
-            <a:off x="2286000" y="3502152"/>
+            <a:off x="1828800" y="3451860"/>
             <a:ext cx="5486400" cy="310896"/>
           </a:xfrm>
           <a:prstGeom prst="rect">
@@ -3575,7 +4341,7 @@
                   <a:srgbClr val="E8ECF4"/>
                 </a:solidFill>
               </a:rPr>
-              <a:t>✅  Obiettivi chiari: classificazione, clustering, forecasting</a:t>
+              <a:t> Obiettivi chiari: classificazione, clustering, forecasting</a:t>
             </a:r>
             <a:endParaRPr lang="it-IT" sz="1300" noProof="1"/>
           </a:p>
@@ -3589,7 +4355,7 @@
         </p:nvSpPr>
         <p:spPr>
           <a:xfrm>
-            <a:off x="2286000" y="3849624"/>
+            <a:off x="1828800" y="3799332"/>
             <a:ext cx="5486400" cy="310896"/>
           </a:xfrm>
           <a:prstGeom prst="rect">
@@ -3611,7 +4377,7 @@
                   <a:srgbClr val="E8ECF4"/>
                 </a:solidFill>
               </a:rPr>
-              <a:t>✅  Rilevanza sociale: sicurezza stradale</a:t>
+              <a:t> Rilevanza sociale: sicurezza stradale</a:t>
             </a:r>
             <a:endParaRPr lang="it-IT" sz="1300" noProof="1"/>
           </a:p>

--- a/incidenti_datascience.pptx
+++ b/incidenti_datascience.pptx
@@ -5,16 +5,18 @@
     <p:sldMasterId id="2147483648" r:id="rId1"/>
   </p:sldMasterIdLst>
   <p:notesMasterIdLst>
-    <p:notesMasterId r:id="rId9"/>
+    <p:notesMasterId r:id="rId11"/>
   </p:notesMasterIdLst>
   <p:sldIdLst>
     <p:sldId id="256" r:id="rId2"/>
     <p:sldId id="257" r:id="rId3"/>
-    <p:sldId id="266" r:id="rId4"/>
-    <p:sldId id="258" r:id="rId5"/>
-    <p:sldId id="264" r:id="rId6"/>
-    <p:sldId id="265" r:id="rId7"/>
-    <p:sldId id="263" r:id="rId8"/>
+    <p:sldId id="265" r:id="rId4"/>
+    <p:sldId id="264" r:id="rId5"/>
+    <p:sldId id="266" r:id="rId6"/>
+    <p:sldId id="268" r:id="rId7"/>
+    <p:sldId id="269" r:id="rId8"/>
+    <p:sldId id="267" r:id="rId9"/>
+    <p:sldId id="263" r:id="rId10"/>
   </p:sldIdLst>
   <p:sldSz cx="9144000" cy="5143500" type="screen16x9"/>
   <p:notesSz cx="5143500" cy="9144000"/>
@@ -371,6 +373,54 @@
           <a:bodyPr/>
           <a:lstStyle/>
           <a:p>
+            <a:r>
+              <a:rPr lang="en-US" dirty="0"/>
+              <a:t>Tutte le </a:t>
+            </a:r>
+            <a:r>
+              <a:rPr lang="en-US" dirty="0" err="1"/>
+              <a:t>nostre</a:t>
+            </a:r>
+            <a:r>
+              <a:rPr lang="en-US" dirty="0"/>
+              <a:t> </a:t>
+            </a:r>
+            <a:r>
+              <a:rPr lang="en-US" dirty="0" err="1"/>
+              <a:t>statistiche</a:t>
+            </a:r>
+            <a:r>
+              <a:rPr lang="en-US" dirty="0"/>
+              <a:t> </a:t>
+            </a:r>
+            <a:r>
+              <a:rPr lang="en-US" dirty="0" err="1"/>
+              <a:t>sono</a:t>
+            </a:r>
+            <a:r>
+              <a:rPr lang="en-US" dirty="0"/>
+              <a:t> state </a:t>
+            </a:r>
+            <a:r>
+              <a:rPr lang="en-US" dirty="0" err="1"/>
+              <a:t>fatte</a:t>
+            </a:r>
+            <a:r>
+              <a:rPr lang="en-US" dirty="0"/>
+              <a:t> con la media di </a:t>
+            </a:r>
+            <a:r>
+              <a:rPr lang="en-US" dirty="0" err="1"/>
+              <a:t>incidenti</a:t>
+            </a:r>
+            <a:r>
+              <a:rPr lang="en-US" dirty="0"/>
+              <a:t> </a:t>
+            </a:r>
+            <a:r>
+              <a:rPr lang="en-US" dirty="0" err="1"/>
+              <a:t>all’anno</a:t>
+            </a:r>
             <a:endParaRPr lang="en-US" dirty="0"/>
           </a:p>
         </p:txBody>
@@ -416,7 +466,13 @@
   <p:cSld>
     <p:spTree>
       <p:nvGrpSpPr>
-        <p:cNvPr id="1" name=""/>
+        <p:cNvPr id="1" name="">
+          <a:extLst>
+            <a:ext uri="{FF2B5EF4-FFF2-40B4-BE49-F238E27FC236}">
+              <a16:creationId xmlns:a16="http://schemas.microsoft.com/office/drawing/2014/main" id="{50278151-263C-509A-E5C7-56F5DBE5C8EC}"/>
+            </a:ext>
+          </a:extLst>
+        </p:cNvPr>
         <p:cNvGrpSpPr/>
         <p:nvPr/>
       </p:nvGrpSpPr>
@@ -430,7 +486,13 @@
       </p:grpSpPr>
       <p:sp>
         <p:nvSpPr>
-          <p:cNvPr id="2" name="Segnaposto immagine diapositiva 1"/>
+          <p:cNvPr id="2" name="Slide Image Placeholder 1">
+            <a:extLst>
+              <a:ext uri="{FF2B5EF4-FFF2-40B4-BE49-F238E27FC236}">
+                <a16:creationId xmlns:a16="http://schemas.microsoft.com/office/drawing/2014/main" id="{38879EBB-3E8E-424E-E9EC-F32600418964}"/>
+              </a:ext>
+            </a:extLst>
+          </p:cNvPr>
           <p:cNvSpPr>
             <a:spLocks noGrp="1" noRot="1" noChangeAspect="1"/>
           </p:cNvSpPr>
@@ -438,25 +500,17 @@
             <p:ph type="sldImg"/>
           </p:nvPr>
         </p:nvSpPr>
-        <p:spPr>
-          <a:xfrm>
-            <a:off x="-171450" y="1143000"/>
-            <a:ext cx="5486400" cy="3086100"/>
-          </a:xfrm>
-          <a:prstGeom prst="rect">
-            <a:avLst/>
-          </a:prstGeom>
-          <a:noFill/>
-          <a:ln w="12700">
-            <a:solidFill>
-              <a:prstClr val="black"/>
-            </a:solidFill>
-          </a:ln>
-        </p:spPr>
-      </p:sp>
-      <p:sp>
-        <p:nvSpPr>
-          <p:cNvPr id="3" name="Segnaposto note 2"/>
+        <p:spPr/>
+      </p:sp>
+      <p:sp>
+        <p:nvSpPr>
+          <p:cNvPr id="3" name="Notes Placeholder 2">
+            <a:extLst>
+              <a:ext uri="{FF2B5EF4-FFF2-40B4-BE49-F238E27FC236}">
+                <a16:creationId xmlns:a16="http://schemas.microsoft.com/office/drawing/2014/main" id="{0A0725AE-98AF-3E78-A134-7675206077BC}"/>
+              </a:ext>
+            </a:extLst>
+          </p:cNvPr>
           <p:cNvSpPr>
             <a:spLocks noGrp="1"/>
           </p:cNvSpPr>
@@ -464,91 +518,48 @@
             <p:ph type="body" idx="1"/>
           </p:nvPr>
         </p:nvSpPr>
-        <p:spPr>
-          <a:xfrm>
-            <a:off x="514350" y="4400550"/>
-            <a:ext cx="4114800" cy="3600450"/>
-          </a:xfrm>
-          <a:prstGeom prst="rect">
-            <a:avLst/>
-          </a:prstGeom>
-        </p:spPr>
+        <p:spPr/>
         <p:txBody>
           <a:bodyPr/>
           <a:lstStyle/>
           <a:p>
-            <a:pPr marL="0" marR="0" lvl="0" indent="0" algn="l" defTabSz="914400" rtl="0" eaLnBrk="1" fontAlgn="auto" latinLnBrk="0" hangingPunct="1">
-              <a:lnSpc>
-                <a:spcPct val="100000"/>
-              </a:lnSpc>
-              <a:spcBef>
-                <a:spcPts val="0"/>
-              </a:spcBef>
-              <a:spcAft>
-                <a:spcPts val="0"/>
-              </a:spcAft>
-              <a:buClrTx/>
-              <a:buSzTx/>
-              <a:buFontTx/>
-              <a:buNone/>
-              <a:tabLst/>
-              <a:defRPr/>
-            </a:pPr>
-            <a:r>
-              <a:rPr lang="en-US" dirty="0" err="1"/>
-              <a:t>grafico</a:t>
-            </a:r>
-            <a:r>
-              <a:rPr lang="en-US" dirty="0"/>
-              <a:t> a torta utile, circa 3 </a:t>
-            </a:r>
-            <a:r>
-              <a:rPr lang="en-US" dirty="0" err="1"/>
-              <a:t>incidenti</a:t>
-            </a:r>
-            <a:r>
-              <a:rPr lang="en-US" dirty="0"/>
-              <a:t> </a:t>
-            </a:r>
-            <a:r>
-              <a:rPr lang="en-US" dirty="0" err="1"/>
-              <a:t>mortali</a:t>
-            </a:r>
-            <a:r>
-              <a:rPr lang="en-US" dirty="0"/>
-              <a:t> </a:t>
-            </a:r>
-            <a:r>
-              <a:rPr lang="en-US" dirty="0" err="1"/>
-              <a:t>all'anno</a:t>
-            </a:r>
-            <a:r>
-              <a:rPr lang="en-US" dirty="0"/>
-              <a:t> o un </a:t>
-            </a:r>
-            <a:r>
-              <a:rPr lang="en-US" dirty="0" err="1"/>
-              <a:t>grafico</a:t>
-            </a:r>
-            <a:r>
-              <a:rPr lang="en-US" dirty="0"/>
-              <a:t> simile da </a:t>
-            </a:r>
-            <a:r>
-              <a:rPr lang="en-US" dirty="0" err="1"/>
-              <a:t>esporre</a:t>
-            </a:r>
             <a:endParaRPr lang="en-US" dirty="0"/>
           </a:p>
-          <a:p>
-            <a:endParaRPr lang="it-CH" dirty="0"/>
+        </p:txBody>
+      </p:sp>
+      <p:sp>
+        <p:nvSpPr>
+          <p:cNvPr id="4" name="Slide Number Placeholder 3">
+            <a:extLst>
+              <a:ext uri="{FF2B5EF4-FFF2-40B4-BE49-F238E27FC236}">
+                <a16:creationId xmlns:a16="http://schemas.microsoft.com/office/drawing/2014/main" id="{F229B9AB-B6CB-D145-CAB7-2799A8FA8C2A}"/>
+              </a:ext>
+            </a:extLst>
+          </p:cNvPr>
+          <p:cNvSpPr>
+            <a:spLocks noGrp="1"/>
+          </p:cNvSpPr>
+          <p:nvPr>
+            <p:ph type="sldNum" sz="quarter" idx="10"/>
+          </p:nvPr>
+        </p:nvSpPr>
+        <p:spPr/>
+        <p:txBody>
+          <a:bodyPr/>
+          <a:lstStyle/>
+          <a:p>
+            <a:fld id="{F7021451-1387-4CA6-816F-3879F97B5CBC}" type="slidenum">
+              <a:rPr lang="en-US"/>
+              <a:t>3</a:t>
+            </a:fld>
+            <a:endParaRPr lang="en-US"/>
           </a:p>
         </p:txBody>
       </p:sp>
     </p:spTree>
     <p:extLst>
       <p:ext uri="{BB962C8B-B14F-4D97-AF65-F5344CB8AC3E}">
-        <p14:creationId xmlns:p14="http://schemas.microsoft.com/office/powerpoint/2010/main" val="3757069579"/>
+        <p14:creationId xmlns:p14="http://schemas.microsoft.com/office/powerpoint/2010/main" val="603645765"/>
       </p:ext>
     </p:extLst>
   </p:cSld>
@@ -559,90 +570,6 @@
 </file>
 
 <file path=ppt/notesSlides/notesSlide4.xml><?xml version="1.0" encoding="utf-8"?>
-<p:notes xmlns:a="http://schemas.openxmlformats.org/drawingml/2006/main" xmlns:r="http://schemas.openxmlformats.org/officeDocument/2006/relationships" xmlns:p="http://schemas.openxmlformats.org/presentationml/2006/main">
-  <p:cSld>
-    <p:spTree>
-      <p:nvGrpSpPr>
-        <p:cNvPr id="1" name=""/>
-        <p:cNvGrpSpPr/>
-        <p:nvPr/>
-      </p:nvGrpSpPr>
-      <p:grpSpPr>
-        <a:xfrm>
-          <a:off x="0" y="0"/>
-          <a:ext cx="0" cy="0"/>
-          <a:chOff x="0" y="0"/>
-          <a:chExt cx="0" cy="0"/>
-        </a:xfrm>
-      </p:grpSpPr>
-      <p:sp>
-        <p:nvSpPr>
-          <p:cNvPr id="2" name="Slide Image Placeholder 1"/>
-          <p:cNvSpPr>
-            <a:spLocks noGrp="1" noRot="1" noChangeAspect="1"/>
-          </p:cNvSpPr>
-          <p:nvPr>
-            <p:ph type="sldImg"/>
-          </p:nvPr>
-        </p:nvSpPr>
-        <p:spPr/>
-      </p:sp>
-      <p:sp>
-        <p:nvSpPr>
-          <p:cNvPr id="3" name="Notes Placeholder 2"/>
-          <p:cNvSpPr>
-            <a:spLocks noGrp="1"/>
-          </p:cNvSpPr>
-          <p:nvPr>
-            <p:ph type="body" idx="1"/>
-          </p:nvPr>
-        </p:nvSpPr>
-        <p:spPr/>
-        <p:txBody>
-          <a:bodyPr/>
-          <a:lstStyle/>
-          <a:p>
-            <a:endParaRPr lang="en-US" dirty="0"/>
-          </a:p>
-        </p:txBody>
-      </p:sp>
-      <p:sp>
-        <p:nvSpPr>
-          <p:cNvPr id="4" name="Slide Number Placeholder 3"/>
-          <p:cNvSpPr>
-            <a:spLocks noGrp="1"/>
-          </p:cNvSpPr>
-          <p:nvPr>
-            <p:ph type="sldNum" sz="quarter" idx="10"/>
-          </p:nvPr>
-        </p:nvSpPr>
-        <p:spPr/>
-        <p:txBody>
-          <a:bodyPr/>
-          <a:lstStyle/>
-          <a:p>
-            <a:fld id="{F7021451-1387-4CA6-816F-3879F97B5CBC}" type="slidenum">
-              <a:rPr lang="en-US"/>
-              <a:t>4</a:t>
-            </a:fld>
-            <a:endParaRPr lang="en-US"/>
-          </a:p>
-        </p:txBody>
-      </p:sp>
-    </p:spTree>
-    <p:extLst>
-      <p:ext uri="{BB962C8B-B14F-4D97-AF65-F5344CB8AC3E}">
-        <p14:creationId xmlns:p14="http://schemas.microsoft.com/office/powerpoint/2010/main" val="1024086991"/>
-      </p:ext>
-    </p:extLst>
-  </p:cSld>
-  <p:clrMapOvr>
-    <a:masterClrMapping/>
-  </p:clrMapOvr>
-</p:notes>
-</file>
-
-<file path=ppt/notesSlides/notesSlide5.xml><?xml version="1.0" encoding="utf-8"?>
 <p:notes xmlns:a="http://schemas.openxmlformats.org/drawingml/2006/main" xmlns:r="http://schemas.openxmlformats.org/officeDocument/2006/relationships" xmlns:p="http://schemas.openxmlformats.org/presentationml/2006/main">
   <p:cSld>
     <p:spTree>
@@ -731,7 +658,7 @@
           <a:p>
             <a:fld id="{F7021451-1387-4CA6-816F-3879F97B5CBC}" type="slidenum">
               <a:rPr lang="en-US"/>
-              <a:t>5</a:t>
+              <a:t>4</a:t>
             </a:fld>
             <a:endParaRPr lang="en-US"/>
           </a:p>
@@ -741,6 +668,114 @@
     <p:extLst>
       <p:ext uri="{BB962C8B-B14F-4D97-AF65-F5344CB8AC3E}">
         <p14:creationId xmlns:p14="http://schemas.microsoft.com/office/powerpoint/2010/main" val="21001223"/>
+      </p:ext>
+    </p:extLst>
+  </p:cSld>
+  <p:clrMapOvr>
+    <a:masterClrMapping/>
+  </p:clrMapOvr>
+</p:notes>
+</file>
+
+<file path=ppt/notesSlides/notesSlide5.xml><?xml version="1.0" encoding="utf-8"?>
+<p:notes xmlns:a="http://schemas.openxmlformats.org/drawingml/2006/main" xmlns:r="http://schemas.openxmlformats.org/officeDocument/2006/relationships" xmlns:p="http://schemas.openxmlformats.org/presentationml/2006/main">
+  <p:cSld>
+    <p:spTree>
+      <p:nvGrpSpPr>
+        <p:cNvPr id="1" name="">
+          <a:extLst>
+            <a:ext uri="{FF2B5EF4-FFF2-40B4-BE49-F238E27FC236}">
+              <a16:creationId xmlns:a16="http://schemas.microsoft.com/office/drawing/2014/main" id="{25863CA8-555A-1CE2-3880-9F683345E28C}"/>
+            </a:ext>
+          </a:extLst>
+        </p:cNvPr>
+        <p:cNvGrpSpPr/>
+        <p:nvPr/>
+      </p:nvGrpSpPr>
+      <p:grpSpPr>
+        <a:xfrm>
+          <a:off x="0" y="0"/>
+          <a:ext cx="0" cy="0"/>
+          <a:chOff x="0" y="0"/>
+          <a:chExt cx="0" cy="0"/>
+        </a:xfrm>
+      </p:grpSpPr>
+      <p:sp>
+        <p:nvSpPr>
+          <p:cNvPr id="2" name="Slide Image Placeholder 1">
+            <a:extLst>
+              <a:ext uri="{FF2B5EF4-FFF2-40B4-BE49-F238E27FC236}">
+                <a16:creationId xmlns:a16="http://schemas.microsoft.com/office/drawing/2014/main" id="{256349FD-55C8-6E28-AF6A-723DF4BB4C3B}"/>
+              </a:ext>
+            </a:extLst>
+          </p:cNvPr>
+          <p:cNvSpPr>
+            <a:spLocks noGrp="1" noRot="1" noChangeAspect="1"/>
+          </p:cNvSpPr>
+          <p:nvPr>
+            <p:ph type="sldImg"/>
+          </p:nvPr>
+        </p:nvSpPr>
+        <p:spPr/>
+      </p:sp>
+      <p:sp>
+        <p:nvSpPr>
+          <p:cNvPr id="3" name="Notes Placeholder 2">
+            <a:extLst>
+              <a:ext uri="{FF2B5EF4-FFF2-40B4-BE49-F238E27FC236}">
+                <a16:creationId xmlns:a16="http://schemas.microsoft.com/office/drawing/2014/main" id="{19AF3B71-59F9-4E52-8BB0-80ED6238A026}"/>
+              </a:ext>
+            </a:extLst>
+          </p:cNvPr>
+          <p:cNvSpPr>
+            <a:spLocks noGrp="1"/>
+          </p:cNvSpPr>
+          <p:nvPr>
+            <p:ph type="body" idx="1"/>
+          </p:nvPr>
+        </p:nvSpPr>
+        <p:spPr/>
+        <p:txBody>
+          <a:bodyPr/>
+          <a:lstStyle/>
+          <a:p>
+            <a:endParaRPr lang="en-US" dirty="0"/>
+          </a:p>
+        </p:txBody>
+      </p:sp>
+      <p:sp>
+        <p:nvSpPr>
+          <p:cNvPr id="4" name="Slide Number Placeholder 3">
+            <a:extLst>
+              <a:ext uri="{FF2B5EF4-FFF2-40B4-BE49-F238E27FC236}">
+                <a16:creationId xmlns:a16="http://schemas.microsoft.com/office/drawing/2014/main" id="{6BA829DE-AAFA-3E08-E850-CEFBC99BD160}"/>
+              </a:ext>
+            </a:extLst>
+          </p:cNvPr>
+          <p:cNvSpPr>
+            <a:spLocks noGrp="1"/>
+          </p:cNvSpPr>
+          <p:nvPr>
+            <p:ph type="sldNum" sz="quarter" idx="10"/>
+          </p:nvPr>
+        </p:nvSpPr>
+        <p:spPr/>
+        <p:txBody>
+          <a:bodyPr/>
+          <a:lstStyle/>
+          <a:p>
+            <a:fld id="{F7021451-1387-4CA6-816F-3879F97B5CBC}" type="slidenum">
+              <a:rPr lang="en-US"/>
+              <a:t>5</a:t>
+            </a:fld>
+            <a:endParaRPr lang="en-US"/>
+          </a:p>
+        </p:txBody>
+      </p:sp>
+    </p:spTree>
+    <p:extLst>
+      <p:ext uri="{BB962C8B-B14F-4D97-AF65-F5344CB8AC3E}">
+        <p14:creationId xmlns:p14="http://schemas.microsoft.com/office/powerpoint/2010/main" val="974561187"/>
       </p:ext>
     </p:extLst>
   </p:cSld>
@@ -758,7 +793,7 @@
         <p:cNvPr id="1" name="">
           <a:extLst>
             <a:ext uri="{FF2B5EF4-FFF2-40B4-BE49-F238E27FC236}">
-              <a16:creationId xmlns:a16="http://schemas.microsoft.com/office/drawing/2014/main" id="{8D82FD92-27CF-58EE-3DE1-59E89ACBD336}"/>
+              <a16:creationId xmlns:a16="http://schemas.microsoft.com/office/drawing/2014/main" id="{27C671C3-B965-7C4A-479F-CE34422495EA}"/>
             </a:ext>
           </a:extLst>
         </p:cNvPr>
@@ -778,7 +813,7 @@
           <p:cNvPr id="2" name="Slide Image Placeholder 1">
             <a:extLst>
               <a:ext uri="{FF2B5EF4-FFF2-40B4-BE49-F238E27FC236}">
-                <a16:creationId xmlns:a16="http://schemas.microsoft.com/office/drawing/2014/main" id="{0C35497A-7749-56C1-3F93-6FA02ABA6440}"/>
+                <a16:creationId xmlns:a16="http://schemas.microsoft.com/office/drawing/2014/main" id="{5499E95B-7A91-A42D-9C11-A7CBF7D80BAF}"/>
               </a:ext>
             </a:extLst>
           </p:cNvPr>
@@ -796,7 +831,7 @@
           <p:cNvPr id="3" name="Notes Placeholder 2">
             <a:extLst>
               <a:ext uri="{FF2B5EF4-FFF2-40B4-BE49-F238E27FC236}">
-                <a16:creationId xmlns:a16="http://schemas.microsoft.com/office/drawing/2014/main" id="{A36F1386-6F4D-D442-A0CE-ABFB8E2FA828}"/>
+                <a16:creationId xmlns:a16="http://schemas.microsoft.com/office/drawing/2014/main" id="{8A845FBF-A5F3-2436-E155-CCD19BD02AE8}"/>
               </a:ext>
             </a:extLst>
           </p:cNvPr>
@@ -812,165 +847,6 @@
           <a:bodyPr/>
           <a:lstStyle/>
           <a:p>
-            <a:r>
-              <a:rPr lang="en-US" dirty="0"/>
-              <a:t>1. </a:t>
-            </a:r>
-            <a:r>
-              <a:rPr lang="en-US" dirty="0" err="1"/>
-              <a:t>Geoscatter</a:t>
-            </a:r>
-            <a:r>
-              <a:rPr lang="en-US" dirty="0"/>
-              <a:t> </a:t>
-            </a:r>
-          </a:p>
-          <a:p>
-            <a:r>
-              <a:rPr lang="en-US" dirty="0"/>
-              <a:t>2. Ultima </a:t>
-            </a:r>
-            <a:r>
-              <a:rPr lang="en-US" dirty="0" err="1"/>
-              <a:t>cosa</a:t>
-            </a:r>
-            <a:r>
-              <a:rPr lang="en-US" dirty="0"/>
-              <a:t> </a:t>
-            </a:r>
-            <a:r>
-              <a:rPr lang="en-US" dirty="0" err="1"/>
-              <a:t>facoltativa</a:t>
-            </a:r>
-            <a:r>
-              <a:rPr lang="en-US" dirty="0"/>
-              <a:t>:</a:t>
-            </a:r>
-            <a:br>
-              <a:rPr lang="en-US" dirty="0"/>
-            </a:br>
-            <a:r>
-              <a:rPr lang="en-US" dirty="0" err="1"/>
-              <a:t>scaricare</a:t>
-            </a:r>
-            <a:r>
-              <a:rPr lang="en-US" dirty="0"/>
-              <a:t> da </a:t>
-            </a:r>
-            <a:r>
-              <a:rPr lang="en-US" dirty="0" err="1"/>
-              <a:t>meteoswiss</a:t>
-            </a:r>
-            <a:r>
-              <a:rPr lang="en-US" dirty="0"/>
-              <a:t> le temperature a </a:t>
-            </a:r>
-            <a:r>
-              <a:rPr lang="en-US" dirty="0" err="1"/>
-              <a:t>basilea</a:t>
-            </a:r>
-            <a:r>
-              <a:rPr lang="en-US" dirty="0"/>
-              <a:t> </a:t>
-            </a:r>
-            <a:r>
-              <a:rPr lang="en-US" dirty="0" err="1"/>
-              <a:t>città</a:t>
-            </a:r>
-            <a:r>
-              <a:rPr lang="en-US" dirty="0"/>
-              <a:t>, </a:t>
-            </a:r>
-            <a:r>
-              <a:rPr lang="en-US" dirty="0" err="1"/>
-              <a:t>vediamo</a:t>
-            </a:r>
-            <a:r>
-              <a:rPr lang="en-US" dirty="0"/>
-              <a:t> </a:t>
-            </a:r>
-            <a:r>
-              <a:rPr lang="en-US" dirty="0" err="1"/>
-              <a:t>i</a:t>
-            </a:r>
-            <a:r>
-              <a:rPr lang="en-US" dirty="0"/>
-              <a:t> </a:t>
-            </a:r>
-            <a:r>
-              <a:rPr lang="en-US" dirty="0" err="1"/>
-              <a:t>giorni</a:t>
-            </a:r>
-            <a:r>
-              <a:rPr lang="en-US" dirty="0"/>
-              <a:t> di neve e </a:t>
-            </a:r>
-            <a:r>
-              <a:rPr lang="en-US" dirty="0" err="1"/>
-              <a:t>facciamo</a:t>
-            </a:r>
-            <a:r>
-              <a:rPr lang="en-US" dirty="0"/>
-              <a:t> </a:t>
-            </a:r>
-            <a:r>
-              <a:rPr lang="en-US" dirty="0" err="1"/>
-              <a:t>un'analisi</a:t>
-            </a:r>
-            <a:r>
-              <a:rPr lang="en-US" dirty="0"/>
-              <a:t> con neve/</a:t>
-            </a:r>
-            <a:r>
-              <a:rPr lang="en-US" dirty="0" err="1"/>
-              <a:t>incidenti</a:t>
-            </a:r>
-            <a:endParaRPr lang="en-US" dirty="0"/>
-          </a:p>
-          <a:p>
-            <a:r>
-              <a:rPr lang="en-US" dirty="0"/>
-              <a:t>3. </a:t>
-            </a:r>
-            <a:r>
-              <a:rPr lang="en-US" dirty="0" err="1"/>
-              <a:t>può</a:t>
-            </a:r>
-            <a:r>
-              <a:rPr lang="en-US" dirty="0"/>
-              <a:t> </a:t>
-            </a:r>
-            <a:r>
-              <a:rPr lang="en-US" dirty="0" err="1"/>
-              <a:t>essere</a:t>
-            </a:r>
-            <a:r>
-              <a:rPr lang="en-US" dirty="0"/>
-              <a:t> </a:t>
-            </a:r>
-            <a:r>
-              <a:rPr lang="en-US" dirty="0" err="1"/>
-              <a:t>dovuto</a:t>
-            </a:r>
-            <a:r>
-              <a:rPr lang="en-US" dirty="0"/>
-              <a:t> </a:t>
-            </a:r>
-            <a:r>
-              <a:rPr lang="en-US" dirty="0" err="1"/>
-              <a:t>anche</a:t>
-            </a:r>
-            <a:r>
-              <a:rPr lang="en-US" dirty="0"/>
-              <a:t> a piu ore di </a:t>
-            </a:r>
-            <a:r>
-              <a:rPr lang="en-US" dirty="0" err="1"/>
-              <a:t>buio</a:t>
-            </a:r>
-            <a:endParaRPr lang="en-US" dirty="0"/>
-          </a:p>
-          <a:p>
             <a:endParaRPr lang="en-US" dirty="0"/>
           </a:p>
         </p:txBody>
@@ -980,7 +856,7 @@
           <p:cNvPr id="4" name="Slide Number Placeholder 3">
             <a:extLst>
               <a:ext uri="{FF2B5EF4-FFF2-40B4-BE49-F238E27FC236}">
-                <a16:creationId xmlns:a16="http://schemas.microsoft.com/office/drawing/2014/main" id="{732B74B5-845D-99BD-49C4-47A56B1861AF}"/>
+                <a16:creationId xmlns:a16="http://schemas.microsoft.com/office/drawing/2014/main" id="{68F9C6FE-5561-6834-478D-D1239F85A8BC}"/>
               </a:ext>
             </a:extLst>
           </p:cNvPr>
@@ -1007,7 +883,7 @@
     </p:spTree>
     <p:extLst>
       <p:ext uri="{BB962C8B-B14F-4D97-AF65-F5344CB8AC3E}">
-        <p14:creationId xmlns:p14="http://schemas.microsoft.com/office/powerpoint/2010/main" val="531183477"/>
+        <p14:creationId xmlns:p14="http://schemas.microsoft.com/office/powerpoint/2010/main" val="3181943536"/>
       </p:ext>
     </p:extLst>
   </p:cSld>
@@ -1018,6 +894,222 @@
 </file>
 
 <file path=ppt/notesSlides/notesSlide7.xml><?xml version="1.0" encoding="utf-8"?>
+<p:notes xmlns:a="http://schemas.openxmlformats.org/drawingml/2006/main" xmlns:r="http://schemas.openxmlformats.org/officeDocument/2006/relationships" xmlns:p="http://schemas.openxmlformats.org/presentationml/2006/main">
+  <p:cSld>
+    <p:spTree>
+      <p:nvGrpSpPr>
+        <p:cNvPr id="1" name="">
+          <a:extLst>
+            <a:ext uri="{FF2B5EF4-FFF2-40B4-BE49-F238E27FC236}">
+              <a16:creationId xmlns:a16="http://schemas.microsoft.com/office/drawing/2014/main" id="{B7A4A035-FAC1-3AAD-7638-A0A17D05A9DC}"/>
+            </a:ext>
+          </a:extLst>
+        </p:cNvPr>
+        <p:cNvGrpSpPr/>
+        <p:nvPr/>
+      </p:nvGrpSpPr>
+      <p:grpSpPr>
+        <a:xfrm>
+          <a:off x="0" y="0"/>
+          <a:ext cx="0" cy="0"/>
+          <a:chOff x="0" y="0"/>
+          <a:chExt cx="0" cy="0"/>
+        </a:xfrm>
+      </p:grpSpPr>
+      <p:sp>
+        <p:nvSpPr>
+          <p:cNvPr id="2" name="Slide Image Placeholder 1">
+            <a:extLst>
+              <a:ext uri="{FF2B5EF4-FFF2-40B4-BE49-F238E27FC236}">
+                <a16:creationId xmlns:a16="http://schemas.microsoft.com/office/drawing/2014/main" id="{8B476EC7-C0E4-64E2-EDFC-3F84A1DF8FB1}"/>
+              </a:ext>
+            </a:extLst>
+          </p:cNvPr>
+          <p:cNvSpPr>
+            <a:spLocks noGrp="1" noRot="1" noChangeAspect="1"/>
+          </p:cNvSpPr>
+          <p:nvPr>
+            <p:ph type="sldImg"/>
+          </p:nvPr>
+        </p:nvSpPr>
+        <p:spPr/>
+      </p:sp>
+      <p:sp>
+        <p:nvSpPr>
+          <p:cNvPr id="3" name="Notes Placeholder 2">
+            <a:extLst>
+              <a:ext uri="{FF2B5EF4-FFF2-40B4-BE49-F238E27FC236}">
+                <a16:creationId xmlns:a16="http://schemas.microsoft.com/office/drawing/2014/main" id="{A1B890D6-4CE5-CD6D-340C-60511AA0F861}"/>
+              </a:ext>
+            </a:extLst>
+          </p:cNvPr>
+          <p:cNvSpPr>
+            <a:spLocks noGrp="1"/>
+          </p:cNvSpPr>
+          <p:nvPr>
+            <p:ph type="body" idx="1"/>
+          </p:nvPr>
+        </p:nvSpPr>
+        <p:spPr/>
+        <p:txBody>
+          <a:bodyPr/>
+          <a:lstStyle/>
+          <a:p>
+            <a:endParaRPr lang="en-US" dirty="0"/>
+          </a:p>
+        </p:txBody>
+      </p:sp>
+      <p:sp>
+        <p:nvSpPr>
+          <p:cNvPr id="4" name="Slide Number Placeholder 3">
+            <a:extLst>
+              <a:ext uri="{FF2B5EF4-FFF2-40B4-BE49-F238E27FC236}">
+                <a16:creationId xmlns:a16="http://schemas.microsoft.com/office/drawing/2014/main" id="{1BD30BE7-C76E-E099-B632-D8DD1516030E}"/>
+              </a:ext>
+            </a:extLst>
+          </p:cNvPr>
+          <p:cNvSpPr>
+            <a:spLocks noGrp="1"/>
+          </p:cNvSpPr>
+          <p:nvPr>
+            <p:ph type="sldNum" sz="quarter" idx="10"/>
+          </p:nvPr>
+        </p:nvSpPr>
+        <p:spPr/>
+        <p:txBody>
+          <a:bodyPr/>
+          <a:lstStyle/>
+          <a:p>
+            <a:fld id="{F7021451-1387-4CA6-816F-3879F97B5CBC}" type="slidenum">
+              <a:rPr lang="en-US"/>
+              <a:t>7</a:t>
+            </a:fld>
+            <a:endParaRPr lang="en-US"/>
+          </a:p>
+        </p:txBody>
+      </p:sp>
+    </p:spTree>
+    <p:extLst>
+      <p:ext uri="{BB962C8B-B14F-4D97-AF65-F5344CB8AC3E}">
+        <p14:creationId xmlns:p14="http://schemas.microsoft.com/office/powerpoint/2010/main" val="3958586256"/>
+      </p:ext>
+    </p:extLst>
+  </p:cSld>
+  <p:clrMapOvr>
+    <a:masterClrMapping/>
+  </p:clrMapOvr>
+</p:notes>
+</file>
+
+<file path=ppt/notesSlides/notesSlide8.xml><?xml version="1.0" encoding="utf-8"?>
+<p:notes xmlns:a="http://schemas.openxmlformats.org/drawingml/2006/main" xmlns:r="http://schemas.openxmlformats.org/officeDocument/2006/relationships" xmlns:p="http://schemas.openxmlformats.org/presentationml/2006/main">
+  <p:cSld>
+    <p:spTree>
+      <p:nvGrpSpPr>
+        <p:cNvPr id="1" name="">
+          <a:extLst>
+            <a:ext uri="{FF2B5EF4-FFF2-40B4-BE49-F238E27FC236}">
+              <a16:creationId xmlns:a16="http://schemas.microsoft.com/office/drawing/2014/main" id="{BABD0921-89D2-C76D-A8FA-527096ED7A5F}"/>
+            </a:ext>
+          </a:extLst>
+        </p:cNvPr>
+        <p:cNvGrpSpPr/>
+        <p:nvPr/>
+      </p:nvGrpSpPr>
+      <p:grpSpPr>
+        <a:xfrm>
+          <a:off x="0" y="0"/>
+          <a:ext cx="0" cy="0"/>
+          <a:chOff x="0" y="0"/>
+          <a:chExt cx="0" cy="0"/>
+        </a:xfrm>
+      </p:grpSpPr>
+      <p:sp>
+        <p:nvSpPr>
+          <p:cNvPr id="2" name="Slide Image Placeholder 1">
+            <a:extLst>
+              <a:ext uri="{FF2B5EF4-FFF2-40B4-BE49-F238E27FC236}">
+                <a16:creationId xmlns:a16="http://schemas.microsoft.com/office/drawing/2014/main" id="{B78F594A-6B18-0B7E-9A09-BCB93320112D}"/>
+              </a:ext>
+            </a:extLst>
+          </p:cNvPr>
+          <p:cNvSpPr>
+            <a:spLocks noGrp="1" noRot="1" noChangeAspect="1"/>
+          </p:cNvSpPr>
+          <p:nvPr>
+            <p:ph type="sldImg"/>
+          </p:nvPr>
+        </p:nvSpPr>
+        <p:spPr/>
+      </p:sp>
+      <p:sp>
+        <p:nvSpPr>
+          <p:cNvPr id="3" name="Notes Placeholder 2">
+            <a:extLst>
+              <a:ext uri="{FF2B5EF4-FFF2-40B4-BE49-F238E27FC236}">
+                <a16:creationId xmlns:a16="http://schemas.microsoft.com/office/drawing/2014/main" id="{4A01B534-E97C-E947-6355-F2D4DA92787F}"/>
+              </a:ext>
+            </a:extLst>
+          </p:cNvPr>
+          <p:cNvSpPr>
+            <a:spLocks noGrp="1"/>
+          </p:cNvSpPr>
+          <p:nvPr>
+            <p:ph type="body" idx="1"/>
+          </p:nvPr>
+        </p:nvSpPr>
+        <p:spPr/>
+        <p:txBody>
+          <a:bodyPr/>
+          <a:lstStyle/>
+          <a:p>
+            <a:endParaRPr lang="en-US" dirty="0"/>
+          </a:p>
+        </p:txBody>
+      </p:sp>
+      <p:sp>
+        <p:nvSpPr>
+          <p:cNvPr id="4" name="Slide Number Placeholder 3">
+            <a:extLst>
+              <a:ext uri="{FF2B5EF4-FFF2-40B4-BE49-F238E27FC236}">
+                <a16:creationId xmlns:a16="http://schemas.microsoft.com/office/drawing/2014/main" id="{85B88A56-6BA4-4E5F-FC96-E8A61AAC936D}"/>
+              </a:ext>
+            </a:extLst>
+          </p:cNvPr>
+          <p:cNvSpPr>
+            <a:spLocks noGrp="1"/>
+          </p:cNvSpPr>
+          <p:nvPr>
+            <p:ph type="sldNum" sz="quarter" idx="10"/>
+          </p:nvPr>
+        </p:nvSpPr>
+        <p:spPr/>
+        <p:txBody>
+          <a:bodyPr/>
+          <a:lstStyle/>
+          <a:p>
+            <a:fld id="{F7021451-1387-4CA6-816F-3879F97B5CBC}" type="slidenum">
+              <a:rPr lang="en-US"/>
+              <a:t>8</a:t>
+            </a:fld>
+            <a:endParaRPr lang="en-US"/>
+          </a:p>
+        </p:txBody>
+      </p:sp>
+    </p:spTree>
+    <p:extLst>
+      <p:ext uri="{BB962C8B-B14F-4D97-AF65-F5344CB8AC3E}">
+        <p14:creationId xmlns:p14="http://schemas.microsoft.com/office/powerpoint/2010/main" val="3111510261"/>
+      </p:ext>
+    </p:extLst>
+  </p:cSld>
+  <p:clrMapOvr>
+    <a:masterClrMapping/>
+  </p:clrMapOvr>
+</p:notes>
+</file>
+
+<file path=ppt/notesSlides/notesSlide9.xml><?xml version="1.0" encoding="utf-8"?>
 <p:notes xmlns:a="http://schemas.openxmlformats.org/drawingml/2006/main" xmlns:r="http://schemas.openxmlformats.org/officeDocument/2006/relationships" xmlns:p="http://schemas.openxmlformats.org/presentationml/2006/main">
   <p:cSld>
     <p:spTree>
@@ -1082,7 +1174,7 @@
           <a:p>
             <a:fld id="{F7021451-1387-4CA6-816F-3879F97B5CBC}" type="slidenum">
               <a:rPr lang="en-US"/>
-              <a:t>7</a:t>
+              <a:t>9</a:t>
             </a:fld>
             <a:endParaRPr lang="en-US"/>
           </a:p>
@@ -2961,7 +3053,13 @@
   <p:cSld>
     <p:spTree>
       <p:nvGrpSpPr>
-        <p:cNvPr id="1" name=""/>
+        <p:cNvPr id="1" name="">
+          <a:extLst>
+            <a:ext uri="{FF2B5EF4-FFF2-40B4-BE49-F238E27FC236}">
+              <a16:creationId xmlns:a16="http://schemas.microsoft.com/office/drawing/2014/main" id="{9F7843D3-0904-DDED-54BA-4F49B09E8371}"/>
+            </a:ext>
+          </a:extLst>
+        </p:cNvPr>
         <p:cNvGrpSpPr/>
         <p:nvPr/>
       </p:nvGrpSpPr>
@@ -2973,10 +3071,148 @@
           <a:chExt cx="0" cy="0"/>
         </a:xfrm>
       </p:grpSpPr>
+      <p:sp>
+        <p:nvSpPr>
+          <p:cNvPr id="14" name="Shape 0">
+            <a:extLst>
+              <a:ext uri="{FF2B5EF4-FFF2-40B4-BE49-F238E27FC236}">
+                <a16:creationId xmlns:a16="http://schemas.microsoft.com/office/drawing/2014/main" id="{DE9C6C6E-690C-DE91-CFF0-7665D3599178}"/>
+              </a:ext>
+            </a:extLst>
+          </p:cNvPr>
+          <p:cNvSpPr/>
+          <p:nvPr/>
+        </p:nvSpPr>
+        <p:spPr>
+          <a:xfrm>
+            <a:off x="-1" y="621792"/>
+            <a:ext cx="9144000" cy="4615226"/>
+          </a:xfrm>
+          <a:prstGeom prst="rect">
+            <a:avLst/>
+          </a:prstGeom>
+          <a:solidFill>
+            <a:srgbClr val="191F3A"/>
+          </a:solidFill>
+          <a:ln/>
+        </p:spPr>
+        <p:txBody>
+          <a:bodyPr/>
+          <a:lstStyle/>
+          <a:p>
+            <a:endParaRPr lang="it-IT" noProof="1"/>
+          </a:p>
+        </p:txBody>
+      </p:sp>
+      <p:sp>
+        <p:nvSpPr>
+          <p:cNvPr id="2" name="Shape 0">
+            <a:extLst>
+              <a:ext uri="{FF2B5EF4-FFF2-40B4-BE49-F238E27FC236}">
+                <a16:creationId xmlns:a16="http://schemas.microsoft.com/office/drawing/2014/main" id="{BD82511D-71B0-E73E-8FD9-A0C5CE92F1C8}"/>
+              </a:ext>
+            </a:extLst>
+          </p:cNvPr>
+          <p:cNvSpPr/>
+          <p:nvPr/>
+        </p:nvSpPr>
+        <p:spPr>
+          <a:xfrm>
+            <a:off x="0" y="0"/>
+            <a:ext cx="9144000" cy="685800"/>
+          </a:xfrm>
+          <a:prstGeom prst="rect">
+            <a:avLst/>
+          </a:prstGeom>
+          <a:solidFill>
+            <a:srgbClr val="252C56"/>
+          </a:solidFill>
+          <a:ln/>
+        </p:spPr>
+        <p:txBody>
+          <a:bodyPr/>
+          <a:lstStyle/>
+          <a:p>
+            <a:endParaRPr lang="it-IT" noProof="1"/>
+          </a:p>
+        </p:txBody>
+      </p:sp>
+      <p:sp>
+        <p:nvSpPr>
+          <p:cNvPr id="3" name="Text 1">
+            <a:extLst>
+              <a:ext uri="{FF2B5EF4-FFF2-40B4-BE49-F238E27FC236}">
+                <a16:creationId xmlns:a16="http://schemas.microsoft.com/office/drawing/2014/main" id="{425C6ACA-25FB-F7AA-8B72-4B2D41709DB6}"/>
+              </a:ext>
+            </a:extLst>
+          </p:cNvPr>
+          <p:cNvSpPr/>
+          <p:nvPr/>
+        </p:nvSpPr>
+        <p:spPr>
+          <a:xfrm>
+            <a:off x="457200" y="73152"/>
+            <a:ext cx="8229600" cy="548640"/>
+          </a:xfrm>
+          <a:prstGeom prst="rect">
+            <a:avLst/>
+          </a:prstGeom>
+          <a:noFill/>
+          <a:ln/>
+        </p:spPr>
+        <p:txBody>
+          <a:bodyPr wrap="square" rtlCol="0" anchor="ctr"/>
+          <a:lstStyle/>
+          <a:p>
+            <a:pPr marL="0" indent="0">
+              <a:buNone/>
+            </a:pPr>
+            <a:r>
+              <a:rPr lang="it-IT" sz="2400" b="1" noProof="1">
+                <a:solidFill>
+                  <a:srgbClr val="FFFFFF"/>
+                </a:solidFill>
+              </a:rPr>
+              <a:t>Mappa di calore</a:t>
+            </a:r>
+            <a:endParaRPr lang="it-IT" sz="2400" noProof="1"/>
+          </a:p>
+        </p:txBody>
+      </p:sp>
+      <p:pic>
+        <p:nvPicPr>
+          <p:cNvPr id="5" name="Immagine 4">
+            <a:extLst>
+              <a:ext uri="{FF2B5EF4-FFF2-40B4-BE49-F238E27FC236}">
+                <a16:creationId xmlns:a16="http://schemas.microsoft.com/office/drawing/2014/main" id="{2F5A7FF5-21F1-79FD-FFED-2D206B40D650}"/>
+              </a:ext>
+            </a:extLst>
+          </p:cNvPr>
+          <p:cNvPicPr>
+            <a:picLocks noChangeAspect="1"/>
+          </p:cNvPicPr>
+          <p:nvPr/>
+        </p:nvPicPr>
+        <p:blipFill>
+          <a:blip r:embed="rId3"/>
+          <a:stretch>
+            <a:fillRect/>
+          </a:stretch>
+        </p:blipFill>
+        <p:spPr>
+          <a:xfrm>
+            <a:off x="445305" y="1041793"/>
+            <a:ext cx="8241495" cy="3784207"/>
+          </a:xfrm>
+          <a:prstGeom prst="rect">
+            <a:avLst/>
+          </a:prstGeom>
+        </p:spPr>
+      </p:pic>
     </p:spTree>
     <p:extLst>
       <p:ext uri="{BB962C8B-B14F-4D97-AF65-F5344CB8AC3E}">
-        <p14:creationId xmlns:p14="http://schemas.microsoft.com/office/powerpoint/2010/main" val="2315645209"/>
+        <p14:creationId xmlns:p14="http://schemas.microsoft.com/office/powerpoint/2010/main" val="1012505165"/>
       </p:ext>
     </p:extLst>
   </p:cSld>
@@ -2987,636 +3223,6 @@
 </file>
 
 <file path=ppt/slides/slide4.xml><?xml version="1.0" encoding="utf-8"?>
-<p:sld xmlns:a="http://schemas.openxmlformats.org/drawingml/2006/main" xmlns:r="http://schemas.openxmlformats.org/officeDocument/2006/relationships" xmlns:p="http://schemas.openxmlformats.org/presentationml/2006/main">
-  <p:cSld name="Slide 3">
-    <p:bg>
-      <p:bgPr>
-        <a:solidFill>
-          <a:srgbClr val="1A1F3A"/>
-        </a:solidFill>
-        <a:effectLst/>
-      </p:bgPr>
-    </p:bg>
-    <p:spTree>
-      <p:nvGrpSpPr>
-        <p:cNvPr id="1" name=""/>
-        <p:cNvGrpSpPr/>
-        <p:nvPr/>
-      </p:nvGrpSpPr>
-      <p:grpSpPr>
-        <a:xfrm>
-          <a:off x="0" y="0"/>
-          <a:ext cx="0" cy="0"/>
-          <a:chOff x="0" y="0"/>
-          <a:chExt cx="0" cy="0"/>
-        </a:xfrm>
-      </p:grpSpPr>
-      <p:sp>
-        <p:nvSpPr>
-          <p:cNvPr id="2" name="Shape 0"/>
-          <p:cNvSpPr/>
-          <p:nvPr/>
-        </p:nvSpPr>
-        <p:spPr>
-          <a:xfrm>
-            <a:off x="0" y="0"/>
-            <a:ext cx="9144000" cy="685800"/>
-          </a:xfrm>
-          <a:prstGeom prst="rect">
-            <a:avLst/>
-          </a:prstGeom>
-          <a:solidFill>
-            <a:srgbClr val="252C56"/>
-          </a:solidFill>
-          <a:ln/>
-        </p:spPr>
-        <p:txBody>
-          <a:bodyPr/>
-          <a:lstStyle/>
-          <a:p>
-            <a:endParaRPr lang="it-IT" noProof="1"/>
-          </a:p>
-        </p:txBody>
-      </p:sp>
-      <p:sp>
-        <p:nvSpPr>
-          <p:cNvPr id="3" name="Text 1"/>
-          <p:cNvSpPr/>
-          <p:nvPr/>
-        </p:nvSpPr>
-        <p:spPr>
-          <a:xfrm>
-            <a:off x="457200" y="73152"/>
-            <a:ext cx="8229600" cy="548640"/>
-          </a:xfrm>
-          <a:prstGeom prst="rect">
-            <a:avLst/>
-          </a:prstGeom>
-          <a:noFill/>
-          <a:ln/>
-        </p:spPr>
-        <p:txBody>
-          <a:bodyPr wrap="square" rtlCol="0" anchor="ctr"/>
-          <a:lstStyle/>
-          <a:p>
-            <a:pPr marL="0" indent="0">
-              <a:buNone/>
-            </a:pPr>
-            <a:r>
-              <a:rPr lang="it-IT" sz="2400" b="1" noProof="1">
-                <a:solidFill>
-                  <a:srgbClr val="FFFFFF"/>
-                </a:solidFill>
-              </a:rPr>
-              <a:t>Perché è un Ottimo Dataset?</a:t>
-            </a:r>
-            <a:endParaRPr lang="it-IT" sz="2400" noProof="1"/>
-          </a:p>
-        </p:txBody>
-      </p:sp>
-      <p:sp>
-        <p:nvSpPr>
-          <p:cNvPr id="4" name="Shape 2"/>
-          <p:cNvSpPr/>
-          <p:nvPr/>
-        </p:nvSpPr>
-        <p:spPr>
-          <a:xfrm>
-            <a:off x="274319" y="868680"/>
-            <a:ext cx="3930259" cy="1783080"/>
-          </a:xfrm>
-          <a:prstGeom prst="rect">
-            <a:avLst/>
-          </a:prstGeom>
-          <a:solidFill>
-            <a:srgbClr val="252C56"/>
-          </a:solidFill>
-          <a:ln/>
-        </p:spPr>
-        <p:txBody>
-          <a:bodyPr/>
-          <a:lstStyle/>
-          <a:p>
-            <a:endParaRPr lang="it-IT" noProof="1"/>
-          </a:p>
-        </p:txBody>
-      </p:sp>
-      <p:sp>
-        <p:nvSpPr>
-          <p:cNvPr id="5" name="Shape 3"/>
-          <p:cNvSpPr/>
-          <p:nvPr/>
-        </p:nvSpPr>
-        <p:spPr>
-          <a:xfrm>
-            <a:off x="274320" y="868680"/>
-            <a:ext cx="54864" cy="1783080"/>
-          </a:xfrm>
-          <a:prstGeom prst="rect">
-            <a:avLst/>
-          </a:prstGeom>
-          <a:solidFill>
-            <a:srgbClr val="2EC4B6"/>
-          </a:solidFill>
-          <a:ln/>
-        </p:spPr>
-        <p:txBody>
-          <a:bodyPr/>
-          <a:lstStyle/>
-          <a:p>
-            <a:endParaRPr lang="it-IT" noProof="1"/>
-          </a:p>
-        </p:txBody>
-      </p:sp>
-      <p:sp>
-        <p:nvSpPr>
-          <p:cNvPr id="6" name="Text 4"/>
-          <p:cNvSpPr/>
-          <p:nvPr/>
-        </p:nvSpPr>
-        <p:spPr>
-          <a:xfrm>
-            <a:off x="411479" y="978408"/>
-            <a:ext cx="3613303" cy="365760"/>
-          </a:xfrm>
-          <a:prstGeom prst="rect">
-            <a:avLst/>
-          </a:prstGeom>
-          <a:noFill/>
-          <a:ln/>
-        </p:spPr>
-        <p:txBody>
-          <a:bodyPr wrap="square" rtlCol="0" anchor="ctr"/>
-          <a:lstStyle/>
-          <a:p>
-            <a:pPr marL="0" indent="0">
-              <a:buNone/>
-            </a:pPr>
-            <a:r>
-              <a:rPr lang="it-IT" b="1" noProof="1">
-                <a:solidFill>
-                  <a:srgbClr val="F2C14E"/>
-                </a:solidFill>
-              </a:rPr>
-              <a:t> Ricco &amp; Reale</a:t>
-            </a:r>
-            <a:endParaRPr lang="it-IT" noProof="1"/>
-          </a:p>
-        </p:txBody>
-      </p:sp>
-      <p:sp>
-        <p:nvSpPr>
-          <p:cNvPr id="7" name="Text 5"/>
-          <p:cNvSpPr/>
-          <p:nvPr/>
-        </p:nvSpPr>
-        <p:spPr>
-          <a:xfrm>
-            <a:off x="411479" y="1344168"/>
-            <a:ext cx="3613303" cy="1188720"/>
-          </a:xfrm>
-          <a:prstGeom prst="rect">
-            <a:avLst/>
-          </a:prstGeom>
-          <a:noFill/>
-          <a:ln/>
-        </p:spPr>
-        <p:txBody>
-          <a:bodyPr wrap="square" rtlCol="0" anchor="ctr"/>
-          <a:lstStyle/>
-          <a:p>
-            <a:pPr marL="0" indent="0">
-              <a:buNone/>
-            </a:pPr>
-            <a:r>
-              <a:rPr lang="it-IT" sz="1400" noProof="1">
-                <a:solidFill>
-                  <a:srgbClr val="E8ECF4"/>
-                </a:solidFill>
-              </a:rPr>
-              <a:t>11.000+ record reali su 14 anni. </a:t>
-            </a:r>
-            <a:br>
-              <a:rPr lang="it-IT" sz="1400" noProof="1">
-                <a:solidFill>
-                  <a:srgbClr val="E8ECF4"/>
-                </a:solidFill>
-              </a:rPr>
-            </a:br>
-            <a:r>
-              <a:rPr lang="it-IT" sz="1400" noProof="1">
-                <a:solidFill>
-                  <a:srgbClr val="E8ECF4"/>
-                </a:solidFill>
-              </a:rPr>
-              <a:t>Senza rischi di scarsità di dati.</a:t>
-            </a:r>
-            <a:endParaRPr lang="it-IT" sz="1400" noProof="1"/>
-          </a:p>
-        </p:txBody>
-      </p:sp>
-      <p:sp>
-        <p:nvSpPr>
-          <p:cNvPr id="8" name="Shape 6"/>
-          <p:cNvSpPr/>
-          <p:nvPr/>
-        </p:nvSpPr>
-        <p:spPr>
-          <a:xfrm>
-            <a:off x="4518874" y="868680"/>
-            <a:ext cx="4350806" cy="1783080"/>
-          </a:xfrm>
-          <a:prstGeom prst="rect">
-            <a:avLst/>
-          </a:prstGeom>
-          <a:solidFill>
-            <a:srgbClr val="252C56"/>
-          </a:solidFill>
-          <a:ln/>
-        </p:spPr>
-        <p:txBody>
-          <a:bodyPr/>
-          <a:lstStyle/>
-          <a:p>
-            <a:endParaRPr lang="it-IT" noProof="1"/>
-          </a:p>
-        </p:txBody>
-      </p:sp>
-      <p:sp>
-        <p:nvSpPr>
-          <p:cNvPr id="9" name="Shape 7"/>
-          <p:cNvSpPr/>
-          <p:nvPr/>
-        </p:nvSpPr>
-        <p:spPr>
-          <a:xfrm>
-            <a:off x="4464010" y="868680"/>
-            <a:ext cx="54864" cy="1783080"/>
-          </a:xfrm>
-          <a:prstGeom prst="rect">
-            <a:avLst/>
-          </a:prstGeom>
-          <a:solidFill>
-            <a:srgbClr val="2EC4B6"/>
-          </a:solidFill>
-          <a:ln/>
-        </p:spPr>
-        <p:txBody>
-          <a:bodyPr/>
-          <a:lstStyle/>
-          <a:p>
-            <a:endParaRPr lang="it-IT" noProof="1"/>
-          </a:p>
-        </p:txBody>
-      </p:sp>
-      <p:sp>
-        <p:nvSpPr>
-          <p:cNvPr id="10" name="Text 8"/>
-          <p:cNvSpPr/>
-          <p:nvPr/>
-        </p:nvSpPr>
-        <p:spPr>
-          <a:xfrm>
-            <a:off x="4778305" y="978408"/>
-            <a:ext cx="3999935" cy="365760"/>
-          </a:xfrm>
-          <a:prstGeom prst="rect">
-            <a:avLst/>
-          </a:prstGeom>
-          <a:noFill/>
-          <a:ln/>
-        </p:spPr>
-        <p:txBody>
-          <a:bodyPr wrap="square" rtlCol="0" anchor="ctr"/>
-          <a:lstStyle/>
-          <a:p>
-            <a:pPr marL="0" indent="0">
-              <a:buNone/>
-            </a:pPr>
-            <a:r>
-              <a:rPr lang="it-IT" b="1" noProof="1">
-                <a:solidFill>
-                  <a:srgbClr val="F2C14E"/>
-                </a:solidFill>
-              </a:rPr>
-              <a:t> Multi-Dimensionale</a:t>
-            </a:r>
-            <a:endParaRPr lang="it-IT" noProof="1"/>
-          </a:p>
-        </p:txBody>
-      </p:sp>
-      <p:sp>
-        <p:nvSpPr>
-          <p:cNvPr id="11" name="Text 9"/>
-          <p:cNvSpPr/>
-          <p:nvPr/>
-        </p:nvSpPr>
-        <p:spPr>
-          <a:xfrm>
-            <a:off x="4778305" y="1344168"/>
-            <a:ext cx="3999935" cy="1188720"/>
-          </a:xfrm>
-          <a:prstGeom prst="rect">
-            <a:avLst/>
-          </a:prstGeom>
-          <a:noFill/>
-          <a:ln/>
-        </p:spPr>
-        <p:txBody>
-          <a:bodyPr wrap="square" rtlCol="0" anchor="ctr"/>
-          <a:lstStyle/>
-          <a:p>
-            <a:pPr marL="0" indent="0">
-              <a:buNone/>
-            </a:pPr>
-            <a:r>
-              <a:rPr lang="it-IT" sz="1400" noProof="1">
-                <a:solidFill>
-                  <a:srgbClr val="E8ECF4"/>
-                </a:solidFill>
-              </a:rPr>
-              <a:t>Combina dati temporali (ora, giorno, mese, anno), spaziali (coordinate GPS), categoriali e booleani</a:t>
-            </a:r>
-            <a:endParaRPr lang="it-IT" sz="1400" noProof="1"/>
-          </a:p>
-        </p:txBody>
-      </p:sp>
-      <p:sp>
-        <p:nvSpPr>
-          <p:cNvPr id="16" name="Shape 14"/>
-          <p:cNvSpPr/>
-          <p:nvPr/>
-        </p:nvSpPr>
-        <p:spPr>
-          <a:xfrm>
-            <a:off x="274319" y="2834640"/>
-            <a:ext cx="3930259" cy="1783080"/>
-          </a:xfrm>
-          <a:prstGeom prst="rect">
-            <a:avLst/>
-          </a:prstGeom>
-          <a:solidFill>
-            <a:srgbClr val="252C56"/>
-          </a:solidFill>
-          <a:ln/>
-        </p:spPr>
-        <p:txBody>
-          <a:bodyPr/>
-          <a:lstStyle/>
-          <a:p>
-            <a:endParaRPr lang="it-IT" noProof="1"/>
-          </a:p>
-        </p:txBody>
-      </p:sp>
-      <p:sp>
-        <p:nvSpPr>
-          <p:cNvPr id="17" name="Shape 15"/>
-          <p:cNvSpPr/>
-          <p:nvPr/>
-        </p:nvSpPr>
-        <p:spPr>
-          <a:xfrm>
-            <a:off x="274320" y="2834640"/>
-            <a:ext cx="54864" cy="1783080"/>
-          </a:xfrm>
-          <a:prstGeom prst="rect">
-            <a:avLst/>
-          </a:prstGeom>
-          <a:solidFill>
-            <a:srgbClr val="2EC4B6"/>
-          </a:solidFill>
-          <a:ln/>
-        </p:spPr>
-        <p:txBody>
-          <a:bodyPr/>
-          <a:lstStyle/>
-          <a:p>
-            <a:endParaRPr lang="it-IT" noProof="1"/>
-          </a:p>
-        </p:txBody>
-      </p:sp>
-      <p:sp>
-        <p:nvSpPr>
-          <p:cNvPr id="18" name="Text 16"/>
-          <p:cNvSpPr/>
-          <p:nvPr/>
-        </p:nvSpPr>
-        <p:spPr>
-          <a:xfrm>
-            <a:off x="411479" y="2944368"/>
-            <a:ext cx="3613303" cy="365760"/>
-          </a:xfrm>
-          <a:prstGeom prst="rect">
-            <a:avLst/>
-          </a:prstGeom>
-          <a:noFill/>
-          <a:ln/>
-        </p:spPr>
-        <p:txBody>
-          <a:bodyPr wrap="square" rtlCol="0" anchor="ctr"/>
-          <a:lstStyle/>
-          <a:p>
-            <a:pPr marL="0" indent="0">
-              <a:buNone/>
-            </a:pPr>
-            <a:r>
-              <a:rPr lang="it-IT" b="1" noProof="1">
-                <a:solidFill>
-                  <a:srgbClr val="F2C14E"/>
-                </a:solidFill>
-              </a:rPr>
-              <a:t> Dati Geografici</a:t>
-            </a:r>
-            <a:endParaRPr lang="it-IT" noProof="1"/>
-          </a:p>
-        </p:txBody>
-      </p:sp>
-      <p:sp>
-        <p:nvSpPr>
-          <p:cNvPr id="19" name="Text 17"/>
-          <p:cNvSpPr/>
-          <p:nvPr/>
-        </p:nvSpPr>
-        <p:spPr>
-          <a:xfrm>
-            <a:off x="411479" y="3310128"/>
-            <a:ext cx="3613303" cy="1188720"/>
-          </a:xfrm>
-          <a:prstGeom prst="rect">
-            <a:avLst/>
-          </a:prstGeom>
-          <a:noFill/>
-          <a:ln/>
-        </p:spPr>
-        <p:txBody>
-          <a:bodyPr wrap="square" rtlCol="0" anchor="ctr"/>
-          <a:lstStyle/>
-          <a:p>
-            <a:pPr marL="0" indent="0">
-              <a:buNone/>
-            </a:pPr>
-            <a:r>
-              <a:rPr lang="it-IT" sz="1400" noProof="1">
-                <a:solidFill>
-                  <a:srgbClr val="E8ECF4"/>
-                </a:solidFill>
-              </a:rPr>
-              <a:t>Le coordinate GPS aprono a visualizzazioni su mappa e modelli spaziali </a:t>
-            </a:r>
-            <a:br>
-              <a:rPr lang="it-IT" sz="1400" noProof="1">
-                <a:solidFill>
-                  <a:srgbClr val="E8ECF4"/>
-                </a:solidFill>
-              </a:rPr>
-            </a:br>
-            <a:r>
-              <a:rPr lang="it-IT" sz="1400" noProof="1">
-                <a:solidFill>
-                  <a:srgbClr val="E8ECF4"/>
-                </a:solidFill>
-              </a:rPr>
-              <a:t>— es. zone più pericolose.</a:t>
-            </a:r>
-            <a:endParaRPr lang="it-IT" sz="1400" noProof="1"/>
-          </a:p>
-        </p:txBody>
-      </p:sp>
-      <p:sp>
-        <p:nvSpPr>
-          <p:cNvPr id="20" name="Shape 18"/>
-          <p:cNvSpPr/>
-          <p:nvPr/>
-        </p:nvSpPr>
-        <p:spPr>
-          <a:xfrm>
-            <a:off x="4518874" y="2834640"/>
-            <a:ext cx="4350806" cy="1783080"/>
-          </a:xfrm>
-          <a:prstGeom prst="rect">
-            <a:avLst/>
-          </a:prstGeom>
-          <a:solidFill>
-            <a:srgbClr val="252C56"/>
-          </a:solidFill>
-          <a:ln/>
-        </p:spPr>
-        <p:txBody>
-          <a:bodyPr/>
-          <a:lstStyle/>
-          <a:p>
-            <a:endParaRPr lang="it-IT" noProof="1"/>
-          </a:p>
-        </p:txBody>
-      </p:sp>
-      <p:sp>
-        <p:nvSpPr>
-          <p:cNvPr id="21" name="Shape 19"/>
-          <p:cNvSpPr/>
-          <p:nvPr/>
-        </p:nvSpPr>
-        <p:spPr>
-          <a:xfrm>
-            <a:off x="4464010" y="2834640"/>
-            <a:ext cx="54864" cy="1783080"/>
-          </a:xfrm>
-          <a:prstGeom prst="rect">
-            <a:avLst/>
-          </a:prstGeom>
-          <a:solidFill>
-            <a:srgbClr val="2EC4B6"/>
-          </a:solidFill>
-          <a:ln/>
-        </p:spPr>
-        <p:txBody>
-          <a:bodyPr/>
-          <a:lstStyle/>
-          <a:p>
-            <a:endParaRPr lang="it-IT" noProof="1"/>
-          </a:p>
-        </p:txBody>
-      </p:sp>
-      <p:sp>
-        <p:nvSpPr>
-          <p:cNvPr id="22" name="Text 20"/>
-          <p:cNvSpPr/>
-          <p:nvPr/>
-        </p:nvSpPr>
-        <p:spPr>
-          <a:xfrm>
-            <a:off x="4778305" y="2944368"/>
-            <a:ext cx="3999935" cy="365760"/>
-          </a:xfrm>
-          <a:prstGeom prst="rect">
-            <a:avLst/>
-          </a:prstGeom>
-          <a:noFill/>
-          <a:ln/>
-        </p:spPr>
-        <p:txBody>
-          <a:bodyPr wrap="square" rtlCol="0" anchor="ctr"/>
-          <a:lstStyle/>
-          <a:p>
-            <a:pPr marL="0" indent="0">
-              <a:buNone/>
-            </a:pPr>
-            <a:r>
-              <a:rPr lang="it-IT" b="1" noProof="1">
-                <a:solidFill>
-                  <a:srgbClr val="F2C14E"/>
-                </a:solidFill>
-              </a:rPr>
-              <a:t> Serie Temporale</a:t>
-            </a:r>
-            <a:endParaRPr lang="it-IT" noProof="1"/>
-          </a:p>
-        </p:txBody>
-      </p:sp>
-      <p:sp>
-        <p:nvSpPr>
-          <p:cNvPr id="23" name="Text 21"/>
-          <p:cNvSpPr/>
-          <p:nvPr/>
-        </p:nvSpPr>
-        <p:spPr>
-          <a:xfrm>
-            <a:off x="4778305" y="3310128"/>
-            <a:ext cx="3999935" cy="1188720"/>
-          </a:xfrm>
-          <a:prstGeom prst="rect">
-            <a:avLst/>
-          </a:prstGeom>
-          <a:noFill/>
-          <a:ln/>
-        </p:spPr>
-        <p:txBody>
-          <a:bodyPr wrap="square" rtlCol="0" anchor="ctr"/>
-          <a:lstStyle/>
-          <a:p>
-            <a:pPr marL="0" indent="0">
-              <a:buNone/>
-            </a:pPr>
-            <a:r>
-              <a:rPr lang="it-IT" sz="1400" noProof="1">
-                <a:solidFill>
-                  <a:srgbClr val="E8ECF4"/>
-                </a:solidFill>
-              </a:rPr>
-              <a:t>14 anni di dati permettono analisi di trend, stagionalità, e correlazioni con eventi esterni (COVID-19, lockdown 2020–21).</a:t>
-            </a:r>
-            <a:endParaRPr lang="it-IT" sz="1400" noProof="1"/>
-          </a:p>
-        </p:txBody>
-      </p:sp>
-    </p:spTree>
-  </p:cSld>
-  <p:clrMapOvr>
-    <a:masterClrMapping/>
-  </p:clrMapOvr>
-</p:sld>
-</file>
-
-<file path=ppt/slides/slide5.xml><?xml version="1.0" encoding="utf-8"?>
 <p:sld xmlns:a="http://schemas.openxmlformats.org/drawingml/2006/main" xmlns:r="http://schemas.openxmlformats.org/officeDocument/2006/relationships" xmlns:p="http://schemas.openxmlformats.org/presentationml/2006/main">
   <p:cSld>
     <p:spTree>
@@ -3686,7 +3292,7 @@
         </p:nvSpPr>
         <p:spPr>
           <a:xfrm>
-            <a:off x="0" y="0"/>
+            <a:off x="-1" y="4572"/>
             <a:ext cx="9144000" cy="685800"/>
           </a:xfrm>
           <a:prstGeom prst="rect">
@@ -3741,7 +3347,7 @@
                   <a:srgbClr val="FFFFFF"/>
                 </a:solidFill>
               </a:rPr>
-              <a:t>Esempio analisi</a:t>
+              <a:t>Grafico a torta </a:t>
             </a:r>
             <a:endParaRPr lang="it-IT" sz="2400" noProof="1"/>
           </a:p>
@@ -3749,10 +3355,10 @@
       </p:sp>
       <p:pic>
         <p:nvPicPr>
-          <p:cNvPr id="13" name="Immagine 12">
+          <p:cNvPr id="7" name="Immagine 6">
             <a:extLst>
               <a:ext uri="{FF2B5EF4-FFF2-40B4-BE49-F238E27FC236}">
-                <a16:creationId xmlns:a16="http://schemas.microsoft.com/office/drawing/2014/main" id="{F48F2441-C904-7AF3-C2DF-37D134004DFF}"/>
+                <a16:creationId xmlns:a16="http://schemas.microsoft.com/office/drawing/2014/main" id="{E95F3B87-B0C5-F2C6-1B3A-EE9E058CE64B}"/>
               </a:ext>
             </a:extLst>
           </p:cNvPr>
@@ -3769,8 +3375,8 @@
         </p:blipFill>
         <p:spPr>
           <a:xfrm>
-            <a:off x="751306" y="685800"/>
-            <a:ext cx="7641388" cy="4556266"/>
+            <a:off x="392127" y="1170432"/>
+            <a:ext cx="8359745" cy="3524288"/>
           </a:xfrm>
           <a:prstGeom prst="rect">
             <a:avLst/>
@@ -3781,6 +3387,180 @@
     <p:extLst>
       <p:ext uri="{BB962C8B-B14F-4D97-AF65-F5344CB8AC3E}">
         <p14:creationId xmlns:p14="http://schemas.microsoft.com/office/powerpoint/2010/main" val="2348981580"/>
+      </p:ext>
+    </p:extLst>
+  </p:cSld>
+  <p:clrMapOvr>
+    <a:masterClrMapping/>
+  </p:clrMapOvr>
+</p:sld>
+</file>
+
+<file path=ppt/slides/slide5.xml><?xml version="1.0" encoding="utf-8"?>
+<p:sld xmlns:a="http://schemas.openxmlformats.org/drawingml/2006/main" xmlns:r="http://schemas.openxmlformats.org/officeDocument/2006/relationships" xmlns:p="http://schemas.openxmlformats.org/presentationml/2006/main">
+  <p:cSld>
+    <p:spTree>
+      <p:nvGrpSpPr>
+        <p:cNvPr id="1" name="">
+          <a:extLst>
+            <a:ext uri="{FF2B5EF4-FFF2-40B4-BE49-F238E27FC236}">
+              <a16:creationId xmlns:a16="http://schemas.microsoft.com/office/drawing/2014/main" id="{B63EF174-11C5-60DC-C9DC-2B0A33ADBF22}"/>
+            </a:ext>
+          </a:extLst>
+        </p:cNvPr>
+        <p:cNvGrpSpPr/>
+        <p:nvPr/>
+      </p:nvGrpSpPr>
+      <p:grpSpPr>
+        <a:xfrm>
+          <a:off x="0" y="0"/>
+          <a:ext cx="0" cy="0"/>
+          <a:chOff x="0" y="0"/>
+          <a:chExt cx="0" cy="0"/>
+        </a:xfrm>
+      </p:grpSpPr>
+      <p:sp>
+        <p:nvSpPr>
+          <p:cNvPr id="14" name="Shape 0">
+            <a:extLst>
+              <a:ext uri="{FF2B5EF4-FFF2-40B4-BE49-F238E27FC236}">
+                <a16:creationId xmlns:a16="http://schemas.microsoft.com/office/drawing/2014/main" id="{B2111B05-F14B-3F22-D04B-AC1A44E0FE13}"/>
+              </a:ext>
+            </a:extLst>
+          </p:cNvPr>
+          <p:cNvSpPr/>
+          <p:nvPr/>
+        </p:nvSpPr>
+        <p:spPr>
+          <a:xfrm>
+            <a:off x="-1" y="621792"/>
+            <a:ext cx="9144000" cy="4615226"/>
+          </a:xfrm>
+          <a:prstGeom prst="rect">
+            <a:avLst/>
+          </a:prstGeom>
+          <a:solidFill>
+            <a:srgbClr val="191F3A"/>
+          </a:solidFill>
+          <a:ln/>
+        </p:spPr>
+        <p:txBody>
+          <a:bodyPr/>
+          <a:lstStyle/>
+          <a:p>
+            <a:endParaRPr lang="it-IT" noProof="1"/>
+          </a:p>
+        </p:txBody>
+      </p:sp>
+      <p:sp>
+        <p:nvSpPr>
+          <p:cNvPr id="2" name="Shape 0">
+            <a:extLst>
+              <a:ext uri="{FF2B5EF4-FFF2-40B4-BE49-F238E27FC236}">
+                <a16:creationId xmlns:a16="http://schemas.microsoft.com/office/drawing/2014/main" id="{8F4840C1-EFEF-819D-3C7C-7E8B68A9EDD2}"/>
+              </a:ext>
+            </a:extLst>
+          </p:cNvPr>
+          <p:cNvSpPr/>
+          <p:nvPr/>
+        </p:nvSpPr>
+        <p:spPr>
+          <a:xfrm>
+            <a:off x="-1" y="4572"/>
+            <a:ext cx="9144000" cy="685800"/>
+          </a:xfrm>
+          <a:prstGeom prst="rect">
+            <a:avLst/>
+          </a:prstGeom>
+          <a:solidFill>
+            <a:srgbClr val="252C56"/>
+          </a:solidFill>
+          <a:ln/>
+        </p:spPr>
+        <p:txBody>
+          <a:bodyPr/>
+          <a:lstStyle/>
+          <a:p>
+            <a:endParaRPr lang="it-IT" noProof="1"/>
+          </a:p>
+        </p:txBody>
+      </p:sp>
+      <p:sp>
+        <p:nvSpPr>
+          <p:cNvPr id="3" name="Text 1">
+            <a:extLst>
+              <a:ext uri="{FF2B5EF4-FFF2-40B4-BE49-F238E27FC236}">
+                <a16:creationId xmlns:a16="http://schemas.microsoft.com/office/drawing/2014/main" id="{D866B2C1-428A-E13F-2BC9-5A72A1976746}"/>
+              </a:ext>
+            </a:extLst>
+          </p:cNvPr>
+          <p:cNvSpPr/>
+          <p:nvPr/>
+        </p:nvSpPr>
+        <p:spPr>
+          <a:xfrm>
+            <a:off x="457200" y="73152"/>
+            <a:ext cx="8229600" cy="548640"/>
+          </a:xfrm>
+          <a:prstGeom prst="rect">
+            <a:avLst/>
+          </a:prstGeom>
+          <a:noFill/>
+          <a:ln/>
+        </p:spPr>
+        <p:txBody>
+          <a:bodyPr wrap="square" rtlCol="0" anchor="ctr"/>
+          <a:lstStyle/>
+          <a:p>
+            <a:pPr marL="0" indent="0">
+              <a:buNone/>
+            </a:pPr>
+            <a:r>
+              <a:rPr lang="it-IT" sz="2400" b="1" noProof="1">
+                <a:solidFill>
+                  <a:srgbClr val="FFFFFF"/>
+                </a:solidFill>
+              </a:rPr>
+              <a:t>Cartina incidenti</a:t>
+            </a:r>
+            <a:endParaRPr lang="it-IT" sz="2400" noProof="1"/>
+          </a:p>
+        </p:txBody>
+      </p:sp>
+      <p:pic>
+        <p:nvPicPr>
+          <p:cNvPr id="5" name="Immagine 4">
+            <a:extLst>
+              <a:ext uri="{FF2B5EF4-FFF2-40B4-BE49-F238E27FC236}">
+                <a16:creationId xmlns:a16="http://schemas.microsoft.com/office/drawing/2014/main" id="{339A3A85-8A58-8B95-B8E3-015A195A6A22}"/>
+              </a:ext>
+            </a:extLst>
+          </p:cNvPr>
+          <p:cNvPicPr>
+            <a:picLocks noChangeAspect="1"/>
+          </p:cNvPicPr>
+          <p:nvPr/>
+        </p:nvPicPr>
+        <p:blipFill>
+          <a:blip r:embed="rId3"/>
+          <a:stretch>
+            <a:fillRect/>
+          </a:stretch>
+        </p:blipFill>
+        <p:spPr>
+          <a:xfrm>
+            <a:off x="685799" y="905821"/>
+            <a:ext cx="7772400" cy="4047167"/>
+          </a:xfrm>
+          <a:prstGeom prst="rect">
+            <a:avLst/>
+          </a:prstGeom>
+        </p:spPr>
+      </p:pic>
+    </p:spTree>
+    <p:extLst>
+      <p:ext uri="{BB962C8B-B14F-4D97-AF65-F5344CB8AC3E}">
+        <p14:creationId xmlns:p14="http://schemas.microsoft.com/office/powerpoint/2010/main" val="55081344"/>
       </p:ext>
     </p:extLst>
   </p:cSld>
@@ -3798,7 +3578,7 @@
         <p:cNvPr id="1" name="">
           <a:extLst>
             <a:ext uri="{FF2B5EF4-FFF2-40B4-BE49-F238E27FC236}">
-              <a16:creationId xmlns:a16="http://schemas.microsoft.com/office/drawing/2014/main" id="{5A9CF13F-7885-F3E1-F9A2-B05BD0F459CF}"/>
+              <a16:creationId xmlns:a16="http://schemas.microsoft.com/office/drawing/2014/main" id="{C1ED3B55-DEA1-D960-E8FD-C608A6490016}"/>
             </a:ext>
           </a:extLst>
         </p:cNvPr>
@@ -3818,13 +3598,11 @@
           <p:cNvPr id="14" name="Shape 0">
             <a:extLst>
               <a:ext uri="{FF2B5EF4-FFF2-40B4-BE49-F238E27FC236}">
-                <a16:creationId xmlns:a16="http://schemas.microsoft.com/office/drawing/2014/main" id="{C7697264-9901-8C10-0A87-5B798ED2289A}"/>
+                <a16:creationId xmlns:a16="http://schemas.microsoft.com/office/drawing/2014/main" id="{30CC2D1F-896F-56A8-6523-3A144394B04B}"/>
               </a:ext>
             </a:extLst>
           </p:cNvPr>
-          <p:cNvSpPr>
-            <a:spLocks noGrp="1" noRot="1" noMove="1" noResize="1" noEditPoints="1" noAdjustHandles="1" noChangeArrowheads="1" noChangeShapeType="1"/>
-          </p:cNvSpPr>
+          <p:cNvSpPr/>
           <p:nvPr/>
         </p:nvSpPr>
         <p:spPr>
@@ -3853,7 +3631,7 @@
           <p:cNvPr id="2" name="Shape 0">
             <a:extLst>
               <a:ext uri="{FF2B5EF4-FFF2-40B4-BE49-F238E27FC236}">
-                <a16:creationId xmlns:a16="http://schemas.microsoft.com/office/drawing/2014/main" id="{DCC890A3-F509-E412-E067-D4DF201C2AD8}"/>
+                <a16:creationId xmlns:a16="http://schemas.microsoft.com/office/drawing/2014/main" id="{4DC75C6A-669D-A134-944B-DBCA93FD466F}"/>
               </a:ext>
             </a:extLst>
           </p:cNvPr>
@@ -3862,7 +3640,7 @@
         </p:nvSpPr>
         <p:spPr>
           <a:xfrm>
-            <a:off x="0" y="0"/>
+            <a:off x="-2" y="4572"/>
             <a:ext cx="9144000" cy="685800"/>
           </a:xfrm>
           <a:prstGeom prst="rect">
@@ -3886,7 +3664,7 @@
           <p:cNvPr id="3" name="Text 1">
             <a:extLst>
               <a:ext uri="{FF2B5EF4-FFF2-40B4-BE49-F238E27FC236}">
-                <a16:creationId xmlns:a16="http://schemas.microsoft.com/office/drawing/2014/main" id="{092F9790-356A-A98F-EE88-3DEFD287B6F5}"/>
+                <a16:creationId xmlns:a16="http://schemas.microsoft.com/office/drawing/2014/main" id="{8FADFC6E-9D83-A8A6-BA90-594ED07ABCDC}"/>
               </a:ext>
             </a:extLst>
           </p:cNvPr>
@@ -3917,163 +3695,46 @@
                   <a:srgbClr val="FFFFFF"/>
                 </a:solidFill>
               </a:rPr>
-              <a:t>Possibili analisi future</a:t>
+              <a:t>Incidenti con bici, moto e pedoni </a:t>
             </a:r>
             <a:endParaRPr lang="it-IT" sz="2400" noProof="1"/>
           </a:p>
         </p:txBody>
       </p:sp>
-      <p:sp>
-        <p:nvSpPr>
-          <p:cNvPr id="4" name="CasellaDiTesto 3">
+      <p:pic>
+        <p:nvPicPr>
+          <p:cNvPr id="10" name="Immagine 9">
             <a:extLst>
               <a:ext uri="{FF2B5EF4-FFF2-40B4-BE49-F238E27FC236}">
-                <a16:creationId xmlns:a16="http://schemas.microsoft.com/office/drawing/2014/main" id="{344068D8-59DA-8A7D-FDE1-07382016367F}"/>
+                <a16:creationId xmlns:a16="http://schemas.microsoft.com/office/drawing/2014/main" id="{F023D866-7972-8F4D-E19E-DD88AFAC7D61}"/>
               </a:ext>
             </a:extLst>
           </p:cNvPr>
-          <p:cNvSpPr txBox="1"/>
-          <p:nvPr/>
-        </p:nvSpPr>
-        <p:spPr>
-          <a:xfrm>
-            <a:off x="590549" y="1058918"/>
-            <a:ext cx="7962900" cy="2308324"/>
-          </a:xfrm>
-          <a:prstGeom prst="rect">
-            <a:avLst/>
-          </a:prstGeom>
-          <a:noFill/>
-        </p:spPr>
-        <p:txBody>
-          <a:bodyPr wrap="square" rtlCol="0">
-            <a:spAutoFit/>
-          </a:bodyPr>
-          <a:lstStyle/>
-          <a:p>
-            <a:pPr marL="342900" indent="-342900">
-              <a:buFont typeface="+mj-lt"/>
-              <a:buAutoNum type="arabicPeriod"/>
-            </a:pPr>
-            <a:r>
-              <a:rPr lang="it-CH" dirty="0">
-                <a:solidFill>
-                  <a:schemeClr val="bg1"/>
-                </a:solidFill>
-              </a:rPr>
-              <a:t>DataMaps con relative posizioni d’incidenti </a:t>
-            </a:r>
-            <a:r>
-              <a:rPr lang="it-CH" sz="1200" dirty="0">
-                <a:solidFill>
-                  <a:schemeClr val="bg1">
-                    <a:lumMod val="85000"/>
-                  </a:schemeClr>
-                </a:solidFill>
-              </a:rPr>
-              <a:t>(abbiamo bisogno di aiuto per farlo)</a:t>
-            </a:r>
-          </a:p>
-          <a:p>
-            <a:pPr marL="342900" indent="-342900">
-              <a:buFont typeface="+mj-lt"/>
-              <a:buAutoNum type="arabicPeriod"/>
-            </a:pPr>
-            <a:r>
-              <a:rPr lang="it-CH" dirty="0">
-                <a:solidFill>
-                  <a:schemeClr val="bg1"/>
-                </a:solidFill>
-              </a:rPr>
-              <a:t>Correlazione gravità incidenti </a:t>
-            </a:r>
-            <a:r>
-              <a:rPr lang="it-CH" dirty="0">
-                <a:solidFill>
-                  <a:schemeClr val="bg1"/>
-                </a:solidFill>
-                <a:sym typeface="Wingdings" pitchFamily="2" charset="2"/>
-              </a:rPr>
-              <a:t></a:t>
-            </a:r>
-            <a:r>
-              <a:rPr lang="it-CH" dirty="0">
-                <a:solidFill>
-                  <a:schemeClr val="bg1"/>
-                </a:solidFill>
-              </a:rPr>
-              <a:t> tipo di strada / posizione / moto-bici coinvolte</a:t>
-            </a:r>
-          </a:p>
-          <a:p>
-            <a:pPr marL="342900" indent="-342900">
-              <a:buFont typeface="+mj-lt"/>
-              <a:buAutoNum type="arabicPeriod"/>
-            </a:pPr>
-            <a:r>
-              <a:rPr lang="it-CH" dirty="0">
-                <a:solidFill>
-                  <a:schemeClr val="bg1"/>
-                </a:solidFill>
-              </a:rPr>
-              <a:t>Trend estate/inverno (es. strade più pericolose con la neve)</a:t>
-            </a:r>
-          </a:p>
-          <a:p>
-            <a:pPr marL="342900" indent="-342900">
-              <a:buFont typeface="+mj-lt"/>
-              <a:buAutoNum type="arabicPeriod"/>
-            </a:pPr>
-            <a:endParaRPr lang="it-CH" dirty="0">
-              <a:solidFill>
-                <a:schemeClr val="bg1"/>
-              </a:solidFill>
-            </a:endParaRPr>
-          </a:p>
-          <a:p>
-            <a:r>
-              <a:rPr lang="it-CH" dirty="0">
-                <a:solidFill>
-                  <a:schemeClr val="bg1"/>
-                </a:solidFill>
-              </a:rPr>
-              <a:t>…</a:t>
-            </a:r>
-          </a:p>
-          <a:p>
-            <a:endParaRPr lang="it-CH" dirty="0">
-              <a:solidFill>
-                <a:schemeClr val="bg1"/>
-              </a:solidFill>
-            </a:endParaRPr>
-          </a:p>
-          <a:p>
-            <a:r>
-              <a:rPr lang="it-CH" dirty="0">
-                <a:solidFill>
-                  <a:schemeClr val="bg1"/>
-                </a:solidFill>
-              </a:rPr>
-              <a:t>Consigli? Richieste?</a:t>
-            </a:r>
-          </a:p>
-          <a:p>
-            <a:pPr marL="342900" indent="-342900">
-              <a:buFont typeface="+mj-lt"/>
-              <a:buAutoNum type="arabicPeriod"/>
-            </a:pPr>
-            <a:endParaRPr lang="it-CH" dirty="0">
-              <a:solidFill>
-                <a:schemeClr val="bg1"/>
-              </a:solidFill>
-            </a:endParaRPr>
-          </a:p>
-        </p:txBody>
-      </p:sp>
+          <p:cNvPicPr>
+            <a:picLocks noChangeAspect="1"/>
+          </p:cNvPicPr>
+          <p:nvPr/>
+        </p:nvPicPr>
+        <p:blipFill>
+          <a:blip r:embed="rId3"/>
+          <a:stretch>
+            <a:fillRect/>
+          </a:stretch>
+        </p:blipFill>
+        <p:spPr>
+          <a:xfrm>
+            <a:off x="155031" y="1239012"/>
+            <a:ext cx="8833938" cy="3369466"/>
+          </a:xfrm>
+          <a:prstGeom prst="rect">
+            <a:avLst/>
+          </a:prstGeom>
+        </p:spPr>
+      </p:pic>
     </p:spTree>
     <p:extLst>
       <p:ext uri="{BB962C8B-B14F-4D97-AF65-F5344CB8AC3E}">
-        <p14:creationId xmlns:p14="http://schemas.microsoft.com/office/powerpoint/2010/main" val="386528024"/>
+        <p14:creationId xmlns:p14="http://schemas.microsoft.com/office/powerpoint/2010/main" val="1488686390"/>
       </p:ext>
     </p:extLst>
   </p:cSld>
@@ -4084,6 +3745,353 @@
 </file>
 
 <file path=ppt/slides/slide7.xml><?xml version="1.0" encoding="utf-8"?>
+<p:sld xmlns:a="http://schemas.openxmlformats.org/drawingml/2006/main" xmlns:r="http://schemas.openxmlformats.org/officeDocument/2006/relationships" xmlns:p="http://schemas.openxmlformats.org/presentationml/2006/main">
+  <p:cSld>
+    <p:spTree>
+      <p:nvGrpSpPr>
+        <p:cNvPr id="1" name="">
+          <a:extLst>
+            <a:ext uri="{FF2B5EF4-FFF2-40B4-BE49-F238E27FC236}">
+              <a16:creationId xmlns:a16="http://schemas.microsoft.com/office/drawing/2014/main" id="{2133A90A-3F1E-BA13-F8D0-B0012BC69F37}"/>
+            </a:ext>
+          </a:extLst>
+        </p:cNvPr>
+        <p:cNvGrpSpPr/>
+        <p:nvPr/>
+      </p:nvGrpSpPr>
+      <p:grpSpPr>
+        <a:xfrm>
+          <a:off x="0" y="0"/>
+          <a:ext cx="0" cy="0"/>
+          <a:chOff x="0" y="0"/>
+          <a:chExt cx="0" cy="0"/>
+        </a:xfrm>
+      </p:grpSpPr>
+      <p:sp>
+        <p:nvSpPr>
+          <p:cNvPr id="14" name="Shape 0">
+            <a:extLst>
+              <a:ext uri="{FF2B5EF4-FFF2-40B4-BE49-F238E27FC236}">
+                <a16:creationId xmlns:a16="http://schemas.microsoft.com/office/drawing/2014/main" id="{98AE41F0-DBDB-1C07-E806-B05C9C39FD81}"/>
+              </a:ext>
+            </a:extLst>
+          </p:cNvPr>
+          <p:cNvSpPr/>
+          <p:nvPr/>
+        </p:nvSpPr>
+        <p:spPr>
+          <a:xfrm>
+            <a:off x="-1" y="621792"/>
+            <a:ext cx="9144000" cy="4615226"/>
+          </a:xfrm>
+          <a:prstGeom prst="rect">
+            <a:avLst/>
+          </a:prstGeom>
+          <a:solidFill>
+            <a:srgbClr val="191F3A"/>
+          </a:solidFill>
+          <a:ln/>
+        </p:spPr>
+        <p:txBody>
+          <a:bodyPr/>
+          <a:lstStyle/>
+          <a:p>
+            <a:endParaRPr lang="it-IT" noProof="1"/>
+          </a:p>
+        </p:txBody>
+      </p:sp>
+      <p:sp>
+        <p:nvSpPr>
+          <p:cNvPr id="2" name="Shape 0">
+            <a:extLst>
+              <a:ext uri="{FF2B5EF4-FFF2-40B4-BE49-F238E27FC236}">
+                <a16:creationId xmlns:a16="http://schemas.microsoft.com/office/drawing/2014/main" id="{BFEA2320-A981-C829-78D0-8C237D9F306A}"/>
+              </a:ext>
+            </a:extLst>
+          </p:cNvPr>
+          <p:cNvSpPr/>
+          <p:nvPr/>
+        </p:nvSpPr>
+        <p:spPr>
+          <a:xfrm>
+            <a:off x="-1" y="4572"/>
+            <a:ext cx="9144000" cy="685800"/>
+          </a:xfrm>
+          <a:prstGeom prst="rect">
+            <a:avLst/>
+          </a:prstGeom>
+          <a:solidFill>
+            <a:srgbClr val="252C56"/>
+          </a:solidFill>
+          <a:ln/>
+        </p:spPr>
+        <p:txBody>
+          <a:bodyPr/>
+          <a:lstStyle/>
+          <a:p>
+            <a:endParaRPr lang="it-IT" noProof="1"/>
+          </a:p>
+        </p:txBody>
+      </p:sp>
+      <p:sp>
+        <p:nvSpPr>
+          <p:cNvPr id="3" name="Text 1">
+            <a:extLst>
+              <a:ext uri="{FF2B5EF4-FFF2-40B4-BE49-F238E27FC236}">
+                <a16:creationId xmlns:a16="http://schemas.microsoft.com/office/drawing/2014/main" id="{E3E2A1E0-56F4-C454-CD00-FC43D505980A}"/>
+              </a:ext>
+            </a:extLst>
+          </p:cNvPr>
+          <p:cNvSpPr/>
+          <p:nvPr/>
+        </p:nvSpPr>
+        <p:spPr>
+          <a:xfrm>
+            <a:off x="457200" y="73152"/>
+            <a:ext cx="8229600" cy="548640"/>
+          </a:xfrm>
+          <a:prstGeom prst="rect">
+            <a:avLst/>
+          </a:prstGeom>
+          <a:noFill/>
+          <a:ln/>
+        </p:spPr>
+        <p:txBody>
+          <a:bodyPr wrap="square" rtlCol="0" anchor="ctr"/>
+          <a:lstStyle/>
+          <a:p>
+            <a:pPr marL="0" indent="0">
+              <a:buNone/>
+            </a:pPr>
+            <a:r>
+              <a:rPr lang="it-IT" sz="2400" b="1" noProof="1">
+                <a:solidFill>
+                  <a:srgbClr val="FFFFFF"/>
+                </a:solidFill>
+              </a:rPr>
+              <a:t>Correlazione strada – gravità</a:t>
+            </a:r>
+          </a:p>
+        </p:txBody>
+      </p:sp>
+      <p:pic>
+        <p:nvPicPr>
+          <p:cNvPr id="7" name="Immagine 6">
+            <a:extLst>
+              <a:ext uri="{FF2B5EF4-FFF2-40B4-BE49-F238E27FC236}">
+                <a16:creationId xmlns:a16="http://schemas.microsoft.com/office/drawing/2014/main" id="{0EA10926-DF94-789E-B722-0F99C2BAD10F}"/>
+              </a:ext>
+            </a:extLst>
+          </p:cNvPr>
+          <p:cNvPicPr>
+            <a:picLocks noChangeAspect="1"/>
+          </p:cNvPicPr>
+          <p:nvPr/>
+        </p:nvPicPr>
+        <p:blipFill>
+          <a:blip r:embed="rId3"/>
+          <a:stretch>
+            <a:fillRect/>
+          </a:stretch>
+        </p:blipFill>
+        <p:spPr>
+          <a:xfrm>
+            <a:off x="140325" y="1082498"/>
+            <a:ext cx="8863349" cy="3699560"/>
+          </a:xfrm>
+          <a:prstGeom prst="rect">
+            <a:avLst/>
+          </a:prstGeom>
+        </p:spPr>
+      </p:pic>
+    </p:spTree>
+    <p:extLst>
+      <p:ext uri="{BB962C8B-B14F-4D97-AF65-F5344CB8AC3E}">
+        <p14:creationId xmlns:p14="http://schemas.microsoft.com/office/powerpoint/2010/main" val="4025747173"/>
+      </p:ext>
+    </p:extLst>
+  </p:cSld>
+  <p:clrMapOvr>
+    <a:masterClrMapping/>
+  </p:clrMapOvr>
+</p:sld>
+</file>
+
+<file path=ppt/slides/slide8.xml><?xml version="1.0" encoding="utf-8"?>
+<p:sld xmlns:a="http://schemas.openxmlformats.org/drawingml/2006/main" xmlns:r="http://schemas.openxmlformats.org/officeDocument/2006/relationships" xmlns:p="http://schemas.openxmlformats.org/presentationml/2006/main">
+  <p:cSld>
+    <p:spTree>
+      <p:nvGrpSpPr>
+        <p:cNvPr id="1" name="">
+          <a:extLst>
+            <a:ext uri="{FF2B5EF4-FFF2-40B4-BE49-F238E27FC236}">
+              <a16:creationId xmlns:a16="http://schemas.microsoft.com/office/drawing/2014/main" id="{AC851562-5C6C-825B-A78A-013504018353}"/>
+            </a:ext>
+          </a:extLst>
+        </p:cNvPr>
+        <p:cNvGrpSpPr/>
+        <p:nvPr/>
+      </p:nvGrpSpPr>
+      <p:grpSpPr>
+        <a:xfrm>
+          <a:off x="0" y="0"/>
+          <a:ext cx="0" cy="0"/>
+          <a:chOff x="0" y="0"/>
+          <a:chExt cx="0" cy="0"/>
+        </a:xfrm>
+      </p:grpSpPr>
+      <p:sp>
+        <p:nvSpPr>
+          <p:cNvPr id="14" name="Shape 0">
+            <a:extLst>
+              <a:ext uri="{FF2B5EF4-FFF2-40B4-BE49-F238E27FC236}">
+                <a16:creationId xmlns:a16="http://schemas.microsoft.com/office/drawing/2014/main" id="{589D57A7-BEB6-0380-91AE-BFBED8A62E06}"/>
+              </a:ext>
+            </a:extLst>
+          </p:cNvPr>
+          <p:cNvSpPr/>
+          <p:nvPr/>
+        </p:nvSpPr>
+        <p:spPr>
+          <a:xfrm>
+            <a:off x="-1" y="621792"/>
+            <a:ext cx="9144000" cy="4615226"/>
+          </a:xfrm>
+          <a:prstGeom prst="rect">
+            <a:avLst/>
+          </a:prstGeom>
+          <a:solidFill>
+            <a:srgbClr val="191F3A"/>
+          </a:solidFill>
+          <a:ln/>
+        </p:spPr>
+        <p:txBody>
+          <a:bodyPr/>
+          <a:lstStyle/>
+          <a:p>
+            <a:endParaRPr lang="it-IT" noProof="1"/>
+          </a:p>
+        </p:txBody>
+      </p:sp>
+      <p:sp>
+        <p:nvSpPr>
+          <p:cNvPr id="2" name="Shape 0">
+            <a:extLst>
+              <a:ext uri="{FF2B5EF4-FFF2-40B4-BE49-F238E27FC236}">
+                <a16:creationId xmlns:a16="http://schemas.microsoft.com/office/drawing/2014/main" id="{4740B159-8658-D499-E2ED-7CEF2ED46D6F}"/>
+              </a:ext>
+            </a:extLst>
+          </p:cNvPr>
+          <p:cNvSpPr/>
+          <p:nvPr/>
+        </p:nvSpPr>
+        <p:spPr>
+          <a:xfrm>
+            <a:off x="-1" y="4572"/>
+            <a:ext cx="9144000" cy="685800"/>
+          </a:xfrm>
+          <a:prstGeom prst="rect">
+            <a:avLst/>
+          </a:prstGeom>
+          <a:solidFill>
+            <a:srgbClr val="252C56"/>
+          </a:solidFill>
+          <a:ln/>
+        </p:spPr>
+        <p:txBody>
+          <a:bodyPr/>
+          <a:lstStyle/>
+          <a:p>
+            <a:endParaRPr lang="it-IT" noProof="1"/>
+          </a:p>
+        </p:txBody>
+      </p:sp>
+      <p:sp>
+        <p:nvSpPr>
+          <p:cNvPr id="3" name="Text 1">
+            <a:extLst>
+              <a:ext uri="{FF2B5EF4-FFF2-40B4-BE49-F238E27FC236}">
+                <a16:creationId xmlns:a16="http://schemas.microsoft.com/office/drawing/2014/main" id="{8BD3D36C-B444-0C4D-6ED9-3D7CB860B68C}"/>
+              </a:ext>
+            </a:extLst>
+          </p:cNvPr>
+          <p:cNvSpPr/>
+          <p:nvPr/>
+        </p:nvSpPr>
+        <p:spPr>
+          <a:xfrm>
+            <a:off x="457200" y="73152"/>
+            <a:ext cx="8229600" cy="548640"/>
+          </a:xfrm>
+          <a:prstGeom prst="rect">
+            <a:avLst/>
+          </a:prstGeom>
+          <a:noFill/>
+          <a:ln/>
+        </p:spPr>
+        <p:txBody>
+          <a:bodyPr wrap="square" rtlCol="0" anchor="ctr"/>
+          <a:lstStyle/>
+          <a:p>
+            <a:pPr marL="0" indent="0">
+              <a:buNone/>
+            </a:pPr>
+            <a:r>
+              <a:rPr lang="it-IT" sz="2400" b="1" noProof="1">
+                <a:solidFill>
+                  <a:srgbClr val="FFFFFF"/>
+                </a:solidFill>
+              </a:rPr>
+              <a:t>Incidenti solo auto vs pedoni, moto e bici</a:t>
+            </a:r>
+            <a:endParaRPr lang="it-IT" sz="2400" noProof="1"/>
+          </a:p>
+        </p:txBody>
+      </p:sp>
+      <p:pic>
+        <p:nvPicPr>
+          <p:cNvPr id="6" name="Immagine 5">
+            <a:extLst>
+              <a:ext uri="{FF2B5EF4-FFF2-40B4-BE49-F238E27FC236}">
+                <a16:creationId xmlns:a16="http://schemas.microsoft.com/office/drawing/2014/main" id="{82886FB6-BE4B-884D-894F-0F8B828D029F}"/>
+              </a:ext>
+            </a:extLst>
+          </p:cNvPr>
+          <p:cNvPicPr>
+            <a:picLocks noChangeAspect="1"/>
+          </p:cNvPicPr>
+          <p:nvPr/>
+        </p:nvPicPr>
+        <p:blipFill>
+          <a:blip r:embed="rId3"/>
+          <a:stretch>
+            <a:fillRect/>
+          </a:stretch>
+        </p:blipFill>
+        <p:spPr>
+          <a:xfrm>
+            <a:off x="405557" y="1013375"/>
+            <a:ext cx="8332886" cy="3831675"/>
+          </a:xfrm>
+          <a:prstGeom prst="rect">
+            <a:avLst/>
+          </a:prstGeom>
+        </p:spPr>
+      </p:pic>
+    </p:spTree>
+    <p:extLst>
+      <p:ext uri="{BB962C8B-B14F-4D97-AF65-F5344CB8AC3E}">
+        <p14:creationId xmlns:p14="http://schemas.microsoft.com/office/powerpoint/2010/main" val="10441314"/>
+      </p:ext>
+    </p:extLst>
+  </p:cSld>
+  <p:clrMapOvr>
+    <a:masterClrMapping/>
+  </p:clrMapOvr>
+</p:sld>
+</file>
+
+<file path=ppt/slides/slide9.xml><?xml version="1.0" encoding="utf-8"?>
 <p:sld xmlns:a="http://schemas.openxmlformats.org/drawingml/2006/main" xmlns:r="http://schemas.openxmlformats.org/officeDocument/2006/relationships" xmlns:p="http://schemas.openxmlformats.org/presentationml/2006/main">
   <p:cSld name="Slide 8">
     <p:bg>

--- a/incidenti_datascience.pptx
+++ b/incidenti_datascience.pptx
@@ -5,18 +5,19 @@
     <p:sldMasterId id="2147483648" r:id="rId1"/>
   </p:sldMasterIdLst>
   <p:notesMasterIdLst>
-    <p:notesMasterId r:id="rId11"/>
+    <p:notesMasterId r:id="rId12"/>
   </p:notesMasterIdLst>
   <p:sldIdLst>
     <p:sldId id="256" r:id="rId2"/>
     <p:sldId id="257" r:id="rId3"/>
     <p:sldId id="265" r:id="rId4"/>
-    <p:sldId id="264" r:id="rId5"/>
-    <p:sldId id="266" r:id="rId6"/>
-    <p:sldId id="268" r:id="rId7"/>
-    <p:sldId id="269" r:id="rId8"/>
-    <p:sldId id="267" r:id="rId9"/>
-    <p:sldId id="263" r:id="rId10"/>
+    <p:sldId id="270" r:id="rId5"/>
+    <p:sldId id="264" r:id="rId6"/>
+    <p:sldId id="266" r:id="rId7"/>
+    <p:sldId id="268" r:id="rId8"/>
+    <p:sldId id="269" r:id="rId9"/>
+    <p:sldId id="267" r:id="rId10"/>
+    <p:sldId id="263" r:id="rId11"/>
   </p:sldIdLst>
   <p:sldSz cx="9144000" cy="5143500" type="screen16x9"/>
   <p:notesSz cx="5143500" cy="9144000"/>
@@ -329,6 +330,90 @@
 </p:notes>
 </file>
 
+<file path=ppt/notesSlides/notesSlide10.xml><?xml version="1.0" encoding="utf-8"?>
+<p:notes xmlns:a="http://schemas.openxmlformats.org/drawingml/2006/main" xmlns:r="http://schemas.openxmlformats.org/officeDocument/2006/relationships" xmlns:p="http://schemas.openxmlformats.org/presentationml/2006/main">
+  <p:cSld>
+    <p:spTree>
+      <p:nvGrpSpPr>
+        <p:cNvPr id="1" name=""/>
+        <p:cNvGrpSpPr/>
+        <p:nvPr/>
+      </p:nvGrpSpPr>
+      <p:grpSpPr>
+        <a:xfrm>
+          <a:off x="0" y="0"/>
+          <a:ext cx="0" cy="0"/>
+          <a:chOff x="0" y="0"/>
+          <a:chExt cx="0" cy="0"/>
+        </a:xfrm>
+      </p:grpSpPr>
+      <p:sp>
+        <p:nvSpPr>
+          <p:cNvPr id="2" name="Slide Image Placeholder 1"/>
+          <p:cNvSpPr>
+            <a:spLocks noGrp="1" noRot="1" noChangeAspect="1"/>
+          </p:cNvSpPr>
+          <p:nvPr>
+            <p:ph type="sldImg"/>
+          </p:nvPr>
+        </p:nvSpPr>
+        <p:spPr/>
+      </p:sp>
+      <p:sp>
+        <p:nvSpPr>
+          <p:cNvPr id="3" name="Notes Placeholder 2"/>
+          <p:cNvSpPr>
+            <a:spLocks noGrp="1"/>
+          </p:cNvSpPr>
+          <p:nvPr>
+            <p:ph type="body" idx="1"/>
+          </p:nvPr>
+        </p:nvSpPr>
+        <p:spPr/>
+        <p:txBody>
+          <a:bodyPr/>
+          <a:lstStyle/>
+          <a:p>
+            <a:endParaRPr lang="en-US" dirty="0"/>
+          </a:p>
+        </p:txBody>
+      </p:sp>
+      <p:sp>
+        <p:nvSpPr>
+          <p:cNvPr id="4" name="Slide Number Placeholder 3"/>
+          <p:cNvSpPr>
+            <a:spLocks noGrp="1"/>
+          </p:cNvSpPr>
+          <p:nvPr>
+            <p:ph type="sldNum" sz="quarter" idx="10"/>
+          </p:nvPr>
+        </p:nvSpPr>
+        <p:spPr/>
+        <p:txBody>
+          <a:bodyPr/>
+          <a:lstStyle/>
+          <a:p>
+            <a:fld id="{F7021451-1387-4CA6-816F-3879F97B5CBC}" type="slidenum">
+              <a:rPr lang="en-US"/>
+              <a:t>10</a:t>
+            </a:fld>
+            <a:endParaRPr lang="en-US"/>
+          </a:p>
+        </p:txBody>
+      </p:sp>
+    </p:spTree>
+    <p:extLst>
+      <p:ext uri="{BB962C8B-B14F-4D97-AF65-F5344CB8AC3E}">
+        <p14:creationId xmlns:p14="http://schemas.microsoft.com/office/powerpoint/2010/main" val="1024086991"/>
+      </p:ext>
+    </p:extLst>
+  </p:cSld>
+  <p:clrMapOvr>
+    <a:masterClrMapping/>
+  </p:clrMapOvr>
+</p:notes>
+</file>
+
 <file path=ppt/notesSlides/notesSlide2.xml><?xml version="1.0" encoding="utf-8"?>
 <p:notes xmlns:a="http://schemas.openxmlformats.org/drawingml/2006/main" xmlns:r="http://schemas.openxmlformats.org/officeDocument/2006/relationships" xmlns:p="http://schemas.openxmlformats.org/presentationml/2006/main">
   <p:cSld>
@@ -577,6 +662,129 @@
         <p:cNvPr id="1" name="">
           <a:extLst>
             <a:ext uri="{FF2B5EF4-FFF2-40B4-BE49-F238E27FC236}">
+              <a16:creationId xmlns:a16="http://schemas.microsoft.com/office/drawing/2014/main" id="{CDB6E90C-708F-740B-862C-B164470E0B76}"/>
+            </a:ext>
+          </a:extLst>
+        </p:cNvPr>
+        <p:cNvGrpSpPr/>
+        <p:nvPr/>
+      </p:nvGrpSpPr>
+      <p:grpSpPr>
+        <a:xfrm>
+          <a:off x="0" y="0"/>
+          <a:ext cx="0" cy="0"/>
+          <a:chOff x="0" y="0"/>
+          <a:chExt cx="0" cy="0"/>
+        </a:xfrm>
+      </p:grpSpPr>
+      <p:sp>
+        <p:nvSpPr>
+          <p:cNvPr id="2" name="Slide Image Placeholder 1">
+            <a:extLst>
+              <a:ext uri="{FF2B5EF4-FFF2-40B4-BE49-F238E27FC236}">
+                <a16:creationId xmlns:a16="http://schemas.microsoft.com/office/drawing/2014/main" id="{FCB41AD3-4DFF-5F7B-BADF-AC980F604266}"/>
+              </a:ext>
+            </a:extLst>
+          </p:cNvPr>
+          <p:cNvSpPr>
+            <a:spLocks noGrp="1" noRot="1" noChangeAspect="1"/>
+          </p:cNvSpPr>
+          <p:nvPr>
+            <p:ph type="sldImg"/>
+          </p:nvPr>
+        </p:nvSpPr>
+        <p:spPr/>
+      </p:sp>
+      <p:sp>
+        <p:nvSpPr>
+          <p:cNvPr id="3" name="Notes Placeholder 2">
+            <a:extLst>
+              <a:ext uri="{FF2B5EF4-FFF2-40B4-BE49-F238E27FC236}">
+                <a16:creationId xmlns:a16="http://schemas.microsoft.com/office/drawing/2014/main" id="{9BDD4906-657D-D990-9845-261BE4335076}"/>
+              </a:ext>
+            </a:extLst>
+          </p:cNvPr>
+          <p:cNvSpPr>
+            <a:spLocks noGrp="1"/>
+          </p:cNvSpPr>
+          <p:nvPr>
+            <p:ph type="body" idx="1"/>
+          </p:nvPr>
+        </p:nvSpPr>
+        <p:spPr/>
+        <p:txBody>
+          <a:bodyPr/>
+          <a:lstStyle/>
+          <a:p>
+            <a:r>
+              <a:rPr lang="en-US" dirty="0" err="1"/>
+              <a:t>Nessuna</a:t>
+            </a:r>
+            <a:r>
+              <a:rPr lang="en-US" dirty="0"/>
+              <a:t> </a:t>
+            </a:r>
+            <a:r>
+              <a:rPr lang="en-US" dirty="0" err="1"/>
+              <a:t>correlazione</a:t>
+            </a:r>
+            <a:r>
+              <a:rPr lang="en-US" dirty="0"/>
+              <a:t> Giorno/notte</a:t>
+            </a:r>
+          </a:p>
+        </p:txBody>
+      </p:sp>
+      <p:sp>
+        <p:nvSpPr>
+          <p:cNvPr id="4" name="Slide Number Placeholder 3">
+            <a:extLst>
+              <a:ext uri="{FF2B5EF4-FFF2-40B4-BE49-F238E27FC236}">
+                <a16:creationId xmlns:a16="http://schemas.microsoft.com/office/drawing/2014/main" id="{C59BCA93-F795-876E-3173-5593CCE54B3A}"/>
+              </a:ext>
+            </a:extLst>
+          </p:cNvPr>
+          <p:cNvSpPr>
+            <a:spLocks noGrp="1"/>
+          </p:cNvSpPr>
+          <p:nvPr>
+            <p:ph type="sldNum" sz="quarter" idx="10"/>
+          </p:nvPr>
+        </p:nvSpPr>
+        <p:spPr/>
+        <p:txBody>
+          <a:bodyPr/>
+          <a:lstStyle/>
+          <a:p>
+            <a:fld id="{F7021451-1387-4CA6-816F-3879F97B5CBC}" type="slidenum">
+              <a:rPr lang="en-US"/>
+              <a:t>4</a:t>
+            </a:fld>
+            <a:endParaRPr lang="en-US"/>
+          </a:p>
+        </p:txBody>
+      </p:sp>
+    </p:spTree>
+    <p:extLst>
+      <p:ext uri="{BB962C8B-B14F-4D97-AF65-F5344CB8AC3E}">
+        <p14:creationId xmlns:p14="http://schemas.microsoft.com/office/powerpoint/2010/main" val="2232151999"/>
+      </p:ext>
+    </p:extLst>
+  </p:cSld>
+  <p:clrMapOvr>
+    <a:masterClrMapping/>
+  </p:clrMapOvr>
+</p:notes>
+</file>
+
+<file path=ppt/notesSlides/notesSlide5.xml><?xml version="1.0" encoding="utf-8"?>
+<p:notes xmlns:a="http://schemas.openxmlformats.org/drawingml/2006/main" xmlns:r="http://schemas.openxmlformats.org/officeDocument/2006/relationships" xmlns:p="http://schemas.openxmlformats.org/presentationml/2006/main">
+  <p:cSld>
+    <p:spTree>
+      <p:nvGrpSpPr>
+        <p:cNvPr id="1" name="">
+          <a:extLst>
+            <a:ext uri="{FF2B5EF4-FFF2-40B4-BE49-F238E27FC236}">
               <a16:creationId xmlns:a16="http://schemas.microsoft.com/office/drawing/2014/main" id="{2E8EC2BB-15E5-FA21-75EB-A7D786CDA1B6}"/>
             </a:ext>
           </a:extLst>
@@ -658,7 +866,7 @@
           <a:p>
             <a:fld id="{F7021451-1387-4CA6-816F-3879F97B5CBC}" type="slidenum">
               <a:rPr lang="en-US"/>
-              <a:t>4</a:t>
+              <a:t>5</a:t>
             </a:fld>
             <a:endParaRPr lang="en-US"/>
           </a:p>
@@ -677,7 +885,7 @@
 </p:notes>
 </file>
 
-<file path=ppt/notesSlides/notesSlide5.xml><?xml version="1.0" encoding="utf-8"?>
+<file path=ppt/notesSlides/notesSlide6.xml><?xml version="1.0" encoding="utf-8"?>
 <p:notes xmlns:a="http://schemas.openxmlformats.org/drawingml/2006/main" xmlns:r="http://schemas.openxmlformats.org/officeDocument/2006/relationships" xmlns:p="http://schemas.openxmlformats.org/presentationml/2006/main">
   <p:cSld>
     <p:spTree>
@@ -766,7 +974,7 @@
           <a:p>
             <a:fld id="{F7021451-1387-4CA6-816F-3879F97B5CBC}" type="slidenum">
               <a:rPr lang="en-US"/>
-              <a:t>5</a:t>
+              <a:t>6</a:t>
             </a:fld>
             <a:endParaRPr lang="en-US"/>
           </a:p>
@@ -785,7 +993,7 @@
 </p:notes>
 </file>
 
-<file path=ppt/notesSlides/notesSlide6.xml><?xml version="1.0" encoding="utf-8"?>
+<file path=ppt/notesSlides/notesSlide7.xml><?xml version="1.0" encoding="utf-8"?>
 <p:notes xmlns:a="http://schemas.openxmlformats.org/drawingml/2006/main" xmlns:r="http://schemas.openxmlformats.org/officeDocument/2006/relationships" xmlns:p="http://schemas.openxmlformats.org/presentationml/2006/main">
   <p:cSld>
     <p:spTree>
@@ -874,7 +1082,7 @@
           <a:p>
             <a:fld id="{F7021451-1387-4CA6-816F-3879F97B5CBC}" type="slidenum">
               <a:rPr lang="en-US"/>
-              <a:t>6</a:t>
+              <a:t>7</a:t>
             </a:fld>
             <a:endParaRPr lang="en-US"/>
           </a:p>
@@ -893,7 +1101,7 @@
 </p:notes>
 </file>
 
-<file path=ppt/notesSlides/notesSlide7.xml><?xml version="1.0" encoding="utf-8"?>
+<file path=ppt/notesSlides/notesSlide8.xml><?xml version="1.0" encoding="utf-8"?>
 <p:notes xmlns:a="http://schemas.openxmlformats.org/drawingml/2006/main" xmlns:r="http://schemas.openxmlformats.org/officeDocument/2006/relationships" xmlns:p="http://schemas.openxmlformats.org/presentationml/2006/main">
   <p:cSld>
     <p:spTree>
@@ -982,7 +1190,7 @@
           <a:p>
             <a:fld id="{F7021451-1387-4CA6-816F-3879F97B5CBC}" type="slidenum">
               <a:rPr lang="en-US"/>
-              <a:t>7</a:t>
+              <a:t>8</a:t>
             </a:fld>
             <a:endParaRPr lang="en-US"/>
           </a:p>
@@ -1001,7 +1209,7 @@
 </p:notes>
 </file>
 
-<file path=ppt/notesSlides/notesSlide8.xml><?xml version="1.0" encoding="utf-8"?>
+<file path=ppt/notesSlides/notesSlide9.xml><?xml version="1.0" encoding="utf-8"?>
 <p:notes xmlns:a="http://schemas.openxmlformats.org/drawingml/2006/main" xmlns:r="http://schemas.openxmlformats.org/officeDocument/2006/relationships" xmlns:p="http://schemas.openxmlformats.org/presentationml/2006/main">
   <p:cSld>
     <p:spTree>
@@ -1090,7 +1298,7 @@
           <a:p>
             <a:fld id="{F7021451-1387-4CA6-816F-3879F97B5CBC}" type="slidenum">
               <a:rPr lang="en-US"/>
-              <a:t>8</a:t>
+              <a:t>9</a:t>
             </a:fld>
             <a:endParaRPr lang="en-US"/>
           </a:p>
@@ -1100,90 +1308,6 @@
     <p:extLst>
       <p:ext uri="{BB962C8B-B14F-4D97-AF65-F5344CB8AC3E}">
         <p14:creationId xmlns:p14="http://schemas.microsoft.com/office/powerpoint/2010/main" val="3111510261"/>
-      </p:ext>
-    </p:extLst>
-  </p:cSld>
-  <p:clrMapOvr>
-    <a:masterClrMapping/>
-  </p:clrMapOvr>
-</p:notes>
-</file>
-
-<file path=ppt/notesSlides/notesSlide9.xml><?xml version="1.0" encoding="utf-8"?>
-<p:notes xmlns:a="http://schemas.openxmlformats.org/drawingml/2006/main" xmlns:r="http://schemas.openxmlformats.org/officeDocument/2006/relationships" xmlns:p="http://schemas.openxmlformats.org/presentationml/2006/main">
-  <p:cSld>
-    <p:spTree>
-      <p:nvGrpSpPr>
-        <p:cNvPr id="1" name=""/>
-        <p:cNvGrpSpPr/>
-        <p:nvPr/>
-      </p:nvGrpSpPr>
-      <p:grpSpPr>
-        <a:xfrm>
-          <a:off x="0" y="0"/>
-          <a:ext cx="0" cy="0"/>
-          <a:chOff x="0" y="0"/>
-          <a:chExt cx="0" cy="0"/>
-        </a:xfrm>
-      </p:grpSpPr>
-      <p:sp>
-        <p:nvSpPr>
-          <p:cNvPr id="2" name="Slide Image Placeholder 1"/>
-          <p:cNvSpPr>
-            <a:spLocks noGrp="1" noRot="1" noChangeAspect="1"/>
-          </p:cNvSpPr>
-          <p:nvPr>
-            <p:ph type="sldImg"/>
-          </p:nvPr>
-        </p:nvSpPr>
-        <p:spPr/>
-      </p:sp>
-      <p:sp>
-        <p:nvSpPr>
-          <p:cNvPr id="3" name="Notes Placeholder 2"/>
-          <p:cNvSpPr>
-            <a:spLocks noGrp="1"/>
-          </p:cNvSpPr>
-          <p:nvPr>
-            <p:ph type="body" idx="1"/>
-          </p:nvPr>
-        </p:nvSpPr>
-        <p:spPr/>
-        <p:txBody>
-          <a:bodyPr/>
-          <a:lstStyle/>
-          <a:p>
-            <a:endParaRPr lang="en-US" dirty="0"/>
-          </a:p>
-        </p:txBody>
-      </p:sp>
-      <p:sp>
-        <p:nvSpPr>
-          <p:cNvPr id="4" name="Slide Number Placeholder 3"/>
-          <p:cNvSpPr>
-            <a:spLocks noGrp="1"/>
-          </p:cNvSpPr>
-          <p:nvPr>
-            <p:ph type="sldNum" sz="quarter" idx="10"/>
-          </p:nvPr>
-        </p:nvSpPr>
-        <p:spPr/>
-        <p:txBody>
-          <a:bodyPr/>
-          <a:lstStyle/>
-          <a:p>
-            <a:fld id="{F7021451-1387-4CA6-816F-3879F97B5CBC}" type="slidenum">
-              <a:rPr lang="en-US"/>
-              <a:t>9</a:t>
-            </a:fld>
-            <a:endParaRPr lang="en-US"/>
-          </a:p>
-        </p:txBody>
-      </p:sp>
-    </p:spTree>
-    <p:extLst>
-      <p:ext uri="{BB962C8B-B14F-4D97-AF65-F5344CB8AC3E}">
-        <p14:creationId xmlns:p14="http://schemas.microsoft.com/office/powerpoint/2010/main" val="1024086991"/>
       </p:ext>
     </p:extLst>
   </p:cSld>
@@ -2040,6 +2164,314 @@
 </p:sld>
 </file>
 
+<file path=ppt/slides/slide10.xml><?xml version="1.0" encoding="utf-8"?>
+<p:sld xmlns:a="http://schemas.openxmlformats.org/drawingml/2006/main" xmlns:r="http://schemas.openxmlformats.org/officeDocument/2006/relationships" xmlns:p="http://schemas.openxmlformats.org/presentationml/2006/main">
+  <p:cSld name="Slide 8">
+    <p:bg>
+      <p:bgPr>
+        <a:solidFill>
+          <a:srgbClr val="1A1F3A"/>
+        </a:solidFill>
+        <a:effectLst/>
+      </p:bgPr>
+    </p:bg>
+    <p:spTree>
+      <p:nvGrpSpPr>
+        <p:cNvPr id="1" name=""/>
+        <p:cNvGrpSpPr/>
+        <p:nvPr/>
+      </p:nvGrpSpPr>
+      <p:grpSpPr>
+        <a:xfrm>
+          <a:off x="0" y="0"/>
+          <a:ext cx="0" cy="0"/>
+          <a:chOff x="0" y="0"/>
+          <a:chExt cx="0" cy="0"/>
+        </a:xfrm>
+      </p:grpSpPr>
+      <p:sp>
+        <p:nvSpPr>
+          <p:cNvPr id="2" name="Shape 0"/>
+          <p:cNvSpPr/>
+          <p:nvPr/>
+        </p:nvSpPr>
+        <p:spPr>
+          <a:xfrm>
+            <a:off x="0" y="0"/>
+            <a:ext cx="9144000" cy="5143500"/>
+          </a:xfrm>
+          <a:prstGeom prst="rect">
+            <a:avLst/>
+          </a:prstGeom>
+          <a:solidFill>
+            <a:srgbClr val="10142A"/>
+          </a:solidFill>
+          <a:ln/>
+        </p:spPr>
+        <p:txBody>
+          <a:bodyPr/>
+          <a:lstStyle/>
+          <a:p>
+            <a:endParaRPr lang="it-IT" noProof="1"/>
+          </a:p>
+        </p:txBody>
+      </p:sp>
+      <p:sp>
+        <p:nvSpPr>
+          <p:cNvPr id="3" name="Shape 1"/>
+          <p:cNvSpPr/>
+          <p:nvPr/>
+        </p:nvSpPr>
+        <p:spPr>
+          <a:xfrm>
+            <a:off x="0" y="0"/>
+            <a:ext cx="164592" cy="5143500"/>
+          </a:xfrm>
+          <a:prstGeom prst="rect">
+            <a:avLst/>
+          </a:prstGeom>
+          <a:solidFill>
+            <a:srgbClr val="E84855"/>
+          </a:solidFill>
+          <a:ln/>
+        </p:spPr>
+        <p:txBody>
+          <a:bodyPr/>
+          <a:lstStyle/>
+          <a:p>
+            <a:endParaRPr lang="it-IT" noProof="1"/>
+          </a:p>
+        </p:txBody>
+      </p:sp>
+      <p:sp>
+        <p:nvSpPr>
+          <p:cNvPr id="4" name="Shape 2"/>
+          <p:cNvSpPr/>
+          <p:nvPr/>
+        </p:nvSpPr>
+        <p:spPr>
+          <a:xfrm>
+            <a:off x="8979408" y="0"/>
+            <a:ext cx="164592" cy="5143500"/>
+          </a:xfrm>
+          <a:prstGeom prst="rect">
+            <a:avLst/>
+          </a:prstGeom>
+          <a:solidFill>
+            <a:srgbClr val="2EC4B6"/>
+          </a:solidFill>
+          <a:ln/>
+        </p:spPr>
+        <p:txBody>
+          <a:bodyPr/>
+          <a:lstStyle/>
+          <a:p>
+            <a:endParaRPr lang="it-IT" noProof="1"/>
+          </a:p>
+        </p:txBody>
+      </p:sp>
+      <p:sp>
+        <p:nvSpPr>
+          <p:cNvPr id="5" name="Text 3"/>
+          <p:cNvSpPr/>
+          <p:nvPr/>
+        </p:nvSpPr>
+        <p:spPr>
+          <a:xfrm>
+            <a:off x="457200" y="1188720"/>
+            <a:ext cx="8229600" cy="1005840"/>
+          </a:xfrm>
+          <a:prstGeom prst="rect">
+            <a:avLst/>
+          </a:prstGeom>
+          <a:noFill/>
+          <a:ln/>
+        </p:spPr>
+        <p:txBody>
+          <a:bodyPr wrap="square" rtlCol="0" anchor="ctr"/>
+          <a:lstStyle/>
+          <a:p>
+            <a:pPr marL="0" indent="0" algn="ctr">
+              <a:buNone/>
+            </a:pPr>
+            <a:r>
+              <a:rPr lang="it-IT" sz="3800" b="1" noProof="1">
+                <a:solidFill>
+                  <a:srgbClr val="FFFFFF"/>
+                </a:solidFill>
+              </a:rPr>
+              <a:t>Un Dataset, Infinite Storie</a:t>
+            </a:r>
+            <a:endParaRPr lang="it-IT" sz="3800" noProof="1"/>
+          </a:p>
+        </p:txBody>
+      </p:sp>
+      <p:sp>
+        <p:nvSpPr>
+          <p:cNvPr id="6" name="Text 4"/>
+          <p:cNvSpPr/>
+          <p:nvPr/>
+        </p:nvSpPr>
+        <p:spPr>
+          <a:xfrm>
+            <a:off x="914400" y="2286000"/>
+            <a:ext cx="7315200" cy="731520"/>
+          </a:xfrm>
+          <a:prstGeom prst="rect">
+            <a:avLst/>
+          </a:prstGeom>
+          <a:noFill/>
+          <a:ln/>
+        </p:spPr>
+        <p:txBody>
+          <a:bodyPr wrap="square" rtlCol="0" anchor="ctr"/>
+          <a:lstStyle/>
+          <a:p>
+            <a:pPr marL="0" indent="0" algn="ctr">
+              <a:buNone/>
+            </a:pPr>
+            <a:r>
+              <a:rPr lang="it-IT" sz="1700" noProof="1">
+                <a:solidFill>
+                  <a:srgbClr val="F2C14E"/>
+                </a:solidFill>
+              </a:rPr>
+              <a:t>Ogni record è un incidente reale. L'analisi dei dati può contribuire</a:t>
+            </a:r>
+            <a:endParaRPr lang="it-IT" sz="1700" noProof="1"/>
+          </a:p>
+          <a:p>
+            <a:pPr marL="0" indent="0" algn="ctr">
+              <a:buNone/>
+            </a:pPr>
+            <a:r>
+              <a:rPr lang="it-IT" sz="1700" noProof="1">
+                <a:solidFill>
+                  <a:srgbClr val="F2C14E"/>
+                </a:solidFill>
+              </a:rPr>
+              <a:t>a rendere le strade più sicure.</a:t>
+            </a:r>
+            <a:endParaRPr lang="it-IT" sz="1700" noProof="1"/>
+          </a:p>
+        </p:txBody>
+      </p:sp>
+      <p:sp>
+        <p:nvSpPr>
+          <p:cNvPr id="7" name="Text 5"/>
+          <p:cNvSpPr/>
+          <p:nvPr/>
+        </p:nvSpPr>
+        <p:spPr>
+          <a:xfrm>
+            <a:off x="1828800" y="3104388"/>
+            <a:ext cx="5486400" cy="310896"/>
+          </a:xfrm>
+          <a:prstGeom prst="rect">
+            <a:avLst/>
+          </a:prstGeom>
+          <a:noFill/>
+          <a:ln/>
+        </p:spPr>
+        <p:txBody>
+          <a:bodyPr wrap="square" rtlCol="0" anchor="ctr"/>
+          <a:lstStyle/>
+          <a:p>
+            <a:pPr marL="0" indent="0" algn="ctr">
+              <a:buNone/>
+            </a:pPr>
+            <a:r>
+              <a:rPr lang="it-IT" sz="1300" noProof="1">
+                <a:solidFill>
+                  <a:srgbClr val="E8ECF4"/>
+                </a:solidFill>
+              </a:rPr>
+              <a:t> Dataset reale, ricco e multi-dimensionale</a:t>
+            </a:r>
+            <a:endParaRPr lang="it-IT" sz="1300" noProof="1"/>
+          </a:p>
+        </p:txBody>
+      </p:sp>
+      <p:sp>
+        <p:nvSpPr>
+          <p:cNvPr id="8" name="Text 6"/>
+          <p:cNvSpPr/>
+          <p:nvPr/>
+        </p:nvSpPr>
+        <p:spPr>
+          <a:xfrm>
+            <a:off x="1828800" y="3451860"/>
+            <a:ext cx="5486400" cy="310896"/>
+          </a:xfrm>
+          <a:prstGeom prst="rect">
+            <a:avLst/>
+          </a:prstGeom>
+          <a:noFill/>
+          <a:ln/>
+        </p:spPr>
+        <p:txBody>
+          <a:bodyPr wrap="square" rtlCol="0" anchor="ctr"/>
+          <a:lstStyle/>
+          <a:p>
+            <a:pPr marL="0" indent="0" algn="ctr">
+              <a:buNone/>
+            </a:pPr>
+            <a:r>
+              <a:rPr lang="it-IT" sz="1300" noProof="1">
+                <a:solidFill>
+                  <a:srgbClr val="E8ECF4"/>
+                </a:solidFill>
+              </a:rPr>
+              <a:t> Obiettivi chiari: classificazione, clustering, forecasting</a:t>
+            </a:r>
+            <a:endParaRPr lang="it-IT" sz="1300" noProof="1"/>
+          </a:p>
+        </p:txBody>
+      </p:sp>
+      <p:sp>
+        <p:nvSpPr>
+          <p:cNvPr id="9" name="Text 7"/>
+          <p:cNvSpPr/>
+          <p:nvPr/>
+        </p:nvSpPr>
+        <p:spPr>
+          <a:xfrm>
+            <a:off x="1828800" y="3799332"/>
+            <a:ext cx="5486400" cy="310896"/>
+          </a:xfrm>
+          <a:prstGeom prst="rect">
+            <a:avLst/>
+          </a:prstGeom>
+          <a:noFill/>
+          <a:ln/>
+        </p:spPr>
+        <p:txBody>
+          <a:bodyPr wrap="square" rtlCol="0" anchor="ctr"/>
+          <a:lstStyle/>
+          <a:p>
+            <a:pPr marL="0" indent="0" algn="ctr">
+              <a:buNone/>
+            </a:pPr>
+            <a:r>
+              <a:rPr lang="it-IT" sz="1300" noProof="1">
+                <a:solidFill>
+                  <a:srgbClr val="E8ECF4"/>
+                </a:solidFill>
+              </a:rPr>
+              <a:t> Rilevanza sociale: sicurezza stradale</a:t>
+            </a:r>
+            <a:endParaRPr lang="it-IT" sz="1300" noProof="1"/>
+          </a:p>
+        </p:txBody>
+      </p:sp>
+    </p:spTree>
+  </p:cSld>
+  <p:clrMapOvr>
+    <a:masterClrMapping/>
+  </p:clrMapOvr>
+</p:sld>
+</file>
+
 <file path=ppt/slides/slide2.xml><?xml version="1.0" encoding="utf-8"?>
 <p:sld xmlns:a="http://schemas.openxmlformats.org/drawingml/2006/main" xmlns:r="http://schemas.openxmlformats.org/officeDocument/2006/relationships" xmlns:p="http://schemas.openxmlformats.org/presentationml/2006/main">
   <p:cSld name="Slide 2">
@@ -3173,7 +3605,7 @@
                   <a:srgbClr val="FFFFFF"/>
                 </a:solidFill>
               </a:rPr>
-              <a:t>Mappa di calore</a:t>
+              <a:t>Mappa di calore – Giorno e ora</a:t>
             </a:r>
             <a:endParaRPr lang="it-IT" sz="2400" noProof="1"/>
           </a:p>
@@ -3230,6 +3662,180 @@
         <p:cNvPr id="1" name="">
           <a:extLst>
             <a:ext uri="{FF2B5EF4-FFF2-40B4-BE49-F238E27FC236}">
+              <a16:creationId xmlns:a16="http://schemas.microsoft.com/office/drawing/2014/main" id="{7EED4566-76F7-D6A1-6A7F-2CDECA1B0418}"/>
+            </a:ext>
+          </a:extLst>
+        </p:cNvPr>
+        <p:cNvGrpSpPr/>
+        <p:nvPr/>
+      </p:nvGrpSpPr>
+      <p:grpSpPr>
+        <a:xfrm>
+          <a:off x="0" y="0"/>
+          <a:ext cx="0" cy="0"/>
+          <a:chOff x="0" y="0"/>
+          <a:chExt cx="0" cy="0"/>
+        </a:xfrm>
+      </p:grpSpPr>
+      <p:sp>
+        <p:nvSpPr>
+          <p:cNvPr id="14" name="Shape 0">
+            <a:extLst>
+              <a:ext uri="{FF2B5EF4-FFF2-40B4-BE49-F238E27FC236}">
+                <a16:creationId xmlns:a16="http://schemas.microsoft.com/office/drawing/2014/main" id="{D80A7070-B5DD-52A2-3FC6-B1EF3E60595C}"/>
+              </a:ext>
+            </a:extLst>
+          </p:cNvPr>
+          <p:cNvSpPr/>
+          <p:nvPr/>
+        </p:nvSpPr>
+        <p:spPr>
+          <a:xfrm>
+            <a:off x="-1" y="621792"/>
+            <a:ext cx="9144000" cy="4615226"/>
+          </a:xfrm>
+          <a:prstGeom prst="rect">
+            <a:avLst/>
+          </a:prstGeom>
+          <a:solidFill>
+            <a:srgbClr val="191F3A"/>
+          </a:solidFill>
+          <a:ln/>
+        </p:spPr>
+        <p:txBody>
+          <a:bodyPr/>
+          <a:lstStyle/>
+          <a:p>
+            <a:endParaRPr lang="it-IT" noProof="1"/>
+          </a:p>
+        </p:txBody>
+      </p:sp>
+      <p:sp>
+        <p:nvSpPr>
+          <p:cNvPr id="2" name="Shape 0">
+            <a:extLst>
+              <a:ext uri="{FF2B5EF4-FFF2-40B4-BE49-F238E27FC236}">
+                <a16:creationId xmlns:a16="http://schemas.microsoft.com/office/drawing/2014/main" id="{9D9C85B0-2CA2-3F91-5C74-72F3E79AAB2C}"/>
+              </a:ext>
+            </a:extLst>
+          </p:cNvPr>
+          <p:cNvSpPr/>
+          <p:nvPr/>
+        </p:nvSpPr>
+        <p:spPr>
+          <a:xfrm>
+            <a:off x="0" y="0"/>
+            <a:ext cx="9144000" cy="685800"/>
+          </a:xfrm>
+          <a:prstGeom prst="rect">
+            <a:avLst/>
+          </a:prstGeom>
+          <a:solidFill>
+            <a:srgbClr val="252C56"/>
+          </a:solidFill>
+          <a:ln/>
+        </p:spPr>
+        <p:txBody>
+          <a:bodyPr/>
+          <a:lstStyle/>
+          <a:p>
+            <a:endParaRPr lang="it-IT" noProof="1"/>
+          </a:p>
+        </p:txBody>
+      </p:sp>
+      <p:sp>
+        <p:nvSpPr>
+          <p:cNvPr id="3" name="Text 1">
+            <a:extLst>
+              <a:ext uri="{FF2B5EF4-FFF2-40B4-BE49-F238E27FC236}">
+                <a16:creationId xmlns:a16="http://schemas.microsoft.com/office/drawing/2014/main" id="{24025305-FD81-9EA0-B55C-149F6534A7ED}"/>
+              </a:ext>
+            </a:extLst>
+          </p:cNvPr>
+          <p:cNvSpPr/>
+          <p:nvPr/>
+        </p:nvSpPr>
+        <p:spPr>
+          <a:xfrm>
+            <a:off x="457200" y="73152"/>
+            <a:ext cx="8229600" cy="548640"/>
+          </a:xfrm>
+          <a:prstGeom prst="rect">
+            <a:avLst/>
+          </a:prstGeom>
+          <a:noFill/>
+          <a:ln/>
+        </p:spPr>
+        <p:txBody>
+          <a:bodyPr wrap="square" rtlCol="0" anchor="ctr"/>
+          <a:lstStyle/>
+          <a:p>
+            <a:pPr marL="0" indent="0">
+              <a:buNone/>
+            </a:pPr>
+            <a:r>
+              <a:rPr lang="it-IT" sz="2400" b="1" noProof="1">
+                <a:solidFill>
+                  <a:srgbClr val="FFFFFF"/>
+                </a:solidFill>
+              </a:rPr>
+              <a:t>Mappa di calore – Giorno e ora – GRAVI/MORTALI</a:t>
+            </a:r>
+            <a:endParaRPr lang="it-IT" sz="2400" noProof="1"/>
+          </a:p>
+        </p:txBody>
+      </p:sp>
+      <p:pic>
+        <p:nvPicPr>
+          <p:cNvPr id="6" name="Immagine 5">
+            <a:extLst>
+              <a:ext uri="{FF2B5EF4-FFF2-40B4-BE49-F238E27FC236}">
+                <a16:creationId xmlns:a16="http://schemas.microsoft.com/office/drawing/2014/main" id="{7721C924-6B70-8C18-954C-1D6C3BDCFAE3}"/>
+              </a:ext>
+            </a:extLst>
+          </p:cNvPr>
+          <p:cNvPicPr>
+            <a:picLocks noChangeAspect="1"/>
+          </p:cNvPicPr>
+          <p:nvPr/>
+        </p:nvPicPr>
+        <p:blipFill>
+          <a:blip r:embed="rId3"/>
+          <a:stretch>
+            <a:fillRect/>
+          </a:stretch>
+        </p:blipFill>
+        <p:spPr>
+          <a:xfrm>
+            <a:off x="113575" y="1198050"/>
+            <a:ext cx="8916847" cy="3462709"/>
+          </a:xfrm>
+          <a:prstGeom prst="rect">
+            <a:avLst/>
+          </a:prstGeom>
+        </p:spPr>
+      </p:pic>
+    </p:spTree>
+    <p:extLst>
+      <p:ext uri="{BB962C8B-B14F-4D97-AF65-F5344CB8AC3E}">
+        <p14:creationId xmlns:p14="http://schemas.microsoft.com/office/powerpoint/2010/main" val="1065528728"/>
+      </p:ext>
+    </p:extLst>
+  </p:cSld>
+  <p:clrMapOvr>
+    <a:masterClrMapping/>
+  </p:clrMapOvr>
+</p:sld>
+</file>
+
+<file path=ppt/slides/slide5.xml><?xml version="1.0" encoding="utf-8"?>
+<p:sld xmlns:a="http://schemas.openxmlformats.org/drawingml/2006/main" xmlns:r="http://schemas.openxmlformats.org/officeDocument/2006/relationships" xmlns:p="http://schemas.openxmlformats.org/presentationml/2006/main">
+  <p:cSld>
+    <p:spTree>
+      <p:nvGrpSpPr>
+        <p:cNvPr id="1" name="">
+          <a:extLst>
+            <a:ext uri="{FF2B5EF4-FFF2-40B4-BE49-F238E27FC236}">
               <a16:creationId xmlns:a16="http://schemas.microsoft.com/office/drawing/2014/main" id="{83969B89-3F19-7437-4463-BA81870DED96}"/>
             </a:ext>
           </a:extLst>
@@ -3396,7 +4002,7 @@
 </p:sld>
 </file>
 
-<file path=ppt/slides/slide5.xml><?xml version="1.0" encoding="utf-8"?>
+<file path=ppt/slides/slide6.xml><?xml version="1.0" encoding="utf-8"?>
 <p:sld xmlns:a="http://schemas.openxmlformats.org/drawingml/2006/main" xmlns:r="http://schemas.openxmlformats.org/officeDocument/2006/relationships" xmlns:p="http://schemas.openxmlformats.org/presentationml/2006/main">
   <p:cSld>
     <p:spTree>
@@ -3570,7 +4176,7 @@
 </p:sld>
 </file>
 
-<file path=ppt/slides/slide6.xml><?xml version="1.0" encoding="utf-8"?>
+<file path=ppt/slides/slide7.xml><?xml version="1.0" encoding="utf-8"?>
 <p:sld xmlns:a="http://schemas.openxmlformats.org/drawingml/2006/main" xmlns:r="http://schemas.openxmlformats.org/officeDocument/2006/relationships" xmlns:p="http://schemas.openxmlformats.org/presentationml/2006/main">
   <p:cSld>
     <p:spTree>
@@ -3744,7 +4350,7 @@
 </p:sld>
 </file>
 
-<file path=ppt/slides/slide7.xml><?xml version="1.0" encoding="utf-8"?>
+<file path=ppt/slides/slide8.xml><?xml version="1.0" encoding="utf-8"?>
 <p:sld xmlns:a="http://schemas.openxmlformats.org/drawingml/2006/main" xmlns:r="http://schemas.openxmlformats.org/officeDocument/2006/relationships" xmlns:p="http://schemas.openxmlformats.org/presentationml/2006/main">
   <p:cSld>
     <p:spTree>
@@ -3917,7 +4523,7 @@
 </p:sld>
 </file>
 
-<file path=ppt/slides/slide8.xml><?xml version="1.0" encoding="utf-8"?>
+<file path=ppt/slides/slide9.xml><?xml version="1.0" encoding="utf-8"?>
 <p:sld xmlns:a="http://schemas.openxmlformats.org/drawingml/2006/main" xmlns:r="http://schemas.openxmlformats.org/officeDocument/2006/relationships" xmlns:p="http://schemas.openxmlformats.org/presentationml/2006/main">
   <p:cSld>
     <p:spTree>
@@ -4084,314 +4690,6 @@
         <p14:creationId xmlns:p14="http://schemas.microsoft.com/office/powerpoint/2010/main" val="10441314"/>
       </p:ext>
     </p:extLst>
-  </p:cSld>
-  <p:clrMapOvr>
-    <a:masterClrMapping/>
-  </p:clrMapOvr>
-</p:sld>
-</file>
-
-<file path=ppt/slides/slide9.xml><?xml version="1.0" encoding="utf-8"?>
-<p:sld xmlns:a="http://schemas.openxmlformats.org/drawingml/2006/main" xmlns:r="http://schemas.openxmlformats.org/officeDocument/2006/relationships" xmlns:p="http://schemas.openxmlformats.org/presentationml/2006/main">
-  <p:cSld name="Slide 8">
-    <p:bg>
-      <p:bgPr>
-        <a:solidFill>
-          <a:srgbClr val="1A1F3A"/>
-        </a:solidFill>
-        <a:effectLst/>
-      </p:bgPr>
-    </p:bg>
-    <p:spTree>
-      <p:nvGrpSpPr>
-        <p:cNvPr id="1" name=""/>
-        <p:cNvGrpSpPr/>
-        <p:nvPr/>
-      </p:nvGrpSpPr>
-      <p:grpSpPr>
-        <a:xfrm>
-          <a:off x="0" y="0"/>
-          <a:ext cx="0" cy="0"/>
-          <a:chOff x="0" y="0"/>
-          <a:chExt cx="0" cy="0"/>
-        </a:xfrm>
-      </p:grpSpPr>
-      <p:sp>
-        <p:nvSpPr>
-          <p:cNvPr id="2" name="Shape 0"/>
-          <p:cNvSpPr/>
-          <p:nvPr/>
-        </p:nvSpPr>
-        <p:spPr>
-          <a:xfrm>
-            <a:off x="0" y="0"/>
-            <a:ext cx="9144000" cy="5143500"/>
-          </a:xfrm>
-          <a:prstGeom prst="rect">
-            <a:avLst/>
-          </a:prstGeom>
-          <a:solidFill>
-            <a:srgbClr val="10142A"/>
-          </a:solidFill>
-          <a:ln/>
-        </p:spPr>
-        <p:txBody>
-          <a:bodyPr/>
-          <a:lstStyle/>
-          <a:p>
-            <a:endParaRPr lang="it-IT" noProof="1"/>
-          </a:p>
-        </p:txBody>
-      </p:sp>
-      <p:sp>
-        <p:nvSpPr>
-          <p:cNvPr id="3" name="Shape 1"/>
-          <p:cNvSpPr/>
-          <p:nvPr/>
-        </p:nvSpPr>
-        <p:spPr>
-          <a:xfrm>
-            <a:off x="0" y="0"/>
-            <a:ext cx="164592" cy="5143500"/>
-          </a:xfrm>
-          <a:prstGeom prst="rect">
-            <a:avLst/>
-          </a:prstGeom>
-          <a:solidFill>
-            <a:srgbClr val="E84855"/>
-          </a:solidFill>
-          <a:ln/>
-        </p:spPr>
-        <p:txBody>
-          <a:bodyPr/>
-          <a:lstStyle/>
-          <a:p>
-            <a:endParaRPr lang="it-IT" noProof="1"/>
-          </a:p>
-        </p:txBody>
-      </p:sp>
-      <p:sp>
-        <p:nvSpPr>
-          <p:cNvPr id="4" name="Shape 2"/>
-          <p:cNvSpPr/>
-          <p:nvPr/>
-        </p:nvSpPr>
-        <p:spPr>
-          <a:xfrm>
-            <a:off x="8979408" y="0"/>
-            <a:ext cx="164592" cy="5143500"/>
-          </a:xfrm>
-          <a:prstGeom prst="rect">
-            <a:avLst/>
-          </a:prstGeom>
-          <a:solidFill>
-            <a:srgbClr val="2EC4B6"/>
-          </a:solidFill>
-          <a:ln/>
-        </p:spPr>
-        <p:txBody>
-          <a:bodyPr/>
-          <a:lstStyle/>
-          <a:p>
-            <a:endParaRPr lang="it-IT" noProof="1"/>
-          </a:p>
-        </p:txBody>
-      </p:sp>
-      <p:sp>
-        <p:nvSpPr>
-          <p:cNvPr id="5" name="Text 3"/>
-          <p:cNvSpPr/>
-          <p:nvPr/>
-        </p:nvSpPr>
-        <p:spPr>
-          <a:xfrm>
-            <a:off x="457200" y="1188720"/>
-            <a:ext cx="8229600" cy="1005840"/>
-          </a:xfrm>
-          <a:prstGeom prst="rect">
-            <a:avLst/>
-          </a:prstGeom>
-          <a:noFill/>
-          <a:ln/>
-        </p:spPr>
-        <p:txBody>
-          <a:bodyPr wrap="square" rtlCol="0" anchor="ctr"/>
-          <a:lstStyle/>
-          <a:p>
-            <a:pPr marL="0" indent="0" algn="ctr">
-              <a:buNone/>
-            </a:pPr>
-            <a:r>
-              <a:rPr lang="it-IT" sz="3800" b="1" noProof="1">
-                <a:solidFill>
-                  <a:srgbClr val="FFFFFF"/>
-                </a:solidFill>
-              </a:rPr>
-              <a:t>Un Dataset, Infinite Storie</a:t>
-            </a:r>
-            <a:endParaRPr lang="it-IT" sz="3800" noProof="1"/>
-          </a:p>
-        </p:txBody>
-      </p:sp>
-      <p:sp>
-        <p:nvSpPr>
-          <p:cNvPr id="6" name="Text 4"/>
-          <p:cNvSpPr/>
-          <p:nvPr/>
-        </p:nvSpPr>
-        <p:spPr>
-          <a:xfrm>
-            <a:off x="914400" y="2286000"/>
-            <a:ext cx="7315200" cy="731520"/>
-          </a:xfrm>
-          <a:prstGeom prst="rect">
-            <a:avLst/>
-          </a:prstGeom>
-          <a:noFill/>
-          <a:ln/>
-        </p:spPr>
-        <p:txBody>
-          <a:bodyPr wrap="square" rtlCol="0" anchor="ctr"/>
-          <a:lstStyle/>
-          <a:p>
-            <a:pPr marL="0" indent="0" algn="ctr">
-              <a:buNone/>
-            </a:pPr>
-            <a:r>
-              <a:rPr lang="it-IT" sz="1700" noProof="1">
-                <a:solidFill>
-                  <a:srgbClr val="F2C14E"/>
-                </a:solidFill>
-              </a:rPr>
-              <a:t>Ogni record è un incidente reale. L'analisi dei dati può contribuire</a:t>
-            </a:r>
-            <a:endParaRPr lang="it-IT" sz="1700" noProof="1"/>
-          </a:p>
-          <a:p>
-            <a:pPr marL="0" indent="0" algn="ctr">
-              <a:buNone/>
-            </a:pPr>
-            <a:r>
-              <a:rPr lang="it-IT" sz="1700" noProof="1">
-                <a:solidFill>
-                  <a:srgbClr val="F2C14E"/>
-                </a:solidFill>
-              </a:rPr>
-              <a:t>a rendere le strade più sicure.</a:t>
-            </a:r>
-            <a:endParaRPr lang="it-IT" sz="1700" noProof="1"/>
-          </a:p>
-        </p:txBody>
-      </p:sp>
-      <p:sp>
-        <p:nvSpPr>
-          <p:cNvPr id="7" name="Text 5"/>
-          <p:cNvSpPr/>
-          <p:nvPr/>
-        </p:nvSpPr>
-        <p:spPr>
-          <a:xfrm>
-            <a:off x="1828800" y="3104388"/>
-            <a:ext cx="5486400" cy="310896"/>
-          </a:xfrm>
-          <a:prstGeom prst="rect">
-            <a:avLst/>
-          </a:prstGeom>
-          <a:noFill/>
-          <a:ln/>
-        </p:spPr>
-        <p:txBody>
-          <a:bodyPr wrap="square" rtlCol="0" anchor="ctr"/>
-          <a:lstStyle/>
-          <a:p>
-            <a:pPr marL="0" indent="0" algn="ctr">
-              <a:buNone/>
-            </a:pPr>
-            <a:r>
-              <a:rPr lang="it-IT" sz="1300" noProof="1">
-                <a:solidFill>
-                  <a:srgbClr val="E8ECF4"/>
-                </a:solidFill>
-              </a:rPr>
-              <a:t> Dataset reale, ricco e multi-dimensionale</a:t>
-            </a:r>
-            <a:endParaRPr lang="it-IT" sz="1300" noProof="1"/>
-          </a:p>
-        </p:txBody>
-      </p:sp>
-      <p:sp>
-        <p:nvSpPr>
-          <p:cNvPr id="8" name="Text 6"/>
-          <p:cNvSpPr/>
-          <p:nvPr/>
-        </p:nvSpPr>
-        <p:spPr>
-          <a:xfrm>
-            <a:off x="1828800" y="3451860"/>
-            <a:ext cx="5486400" cy="310896"/>
-          </a:xfrm>
-          <a:prstGeom prst="rect">
-            <a:avLst/>
-          </a:prstGeom>
-          <a:noFill/>
-          <a:ln/>
-        </p:spPr>
-        <p:txBody>
-          <a:bodyPr wrap="square" rtlCol="0" anchor="ctr"/>
-          <a:lstStyle/>
-          <a:p>
-            <a:pPr marL="0" indent="0" algn="ctr">
-              <a:buNone/>
-            </a:pPr>
-            <a:r>
-              <a:rPr lang="it-IT" sz="1300" noProof="1">
-                <a:solidFill>
-                  <a:srgbClr val="E8ECF4"/>
-                </a:solidFill>
-              </a:rPr>
-              <a:t> Obiettivi chiari: classificazione, clustering, forecasting</a:t>
-            </a:r>
-            <a:endParaRPr lang="it-IT" sz="1300" noProof="1"/>
-          </a:p>
-        </p:txBody>
-      </p:sp>
-      <p:sp>
-        <p:nvSpPr>
-          <p:cNvPr id="9" name="Text 7"/>
-          <p:cNvSpPr/>
-          <p:nvPr/>
-        </p:nvSpPr>
-        <p:spPr>
-          <a:xfrm>
-            <a:off x="1828800" y="3799332"/>
-            <a:ext cx="5486400" cy="310896"/>
-          </a:xfrm>
-          <a:prstGeom prst="rect">
-            <a:avLst/>
-          </a:prstGeom>
-          <a:noFill/>
-          <a:ln/>
-        </p:spPr>
-        <p:txBody>
-          <a:bodyPr wrap="square" rtlCol="0" anchor="ctr"/>
-          <a:lstStyle/>
-          <a:p>
-            <a:pPr marL="0" indent="0" algn="ctr">
-              <a:buNone/>
-            </a:pPr>
-            <a:r>
-              <a:rPr lang="it-IT" sz="1300" noProof="1">
-                <a:solidFill>
-                  <a:srgbClr val="E8ECF4"/>
-                </a:solidFill>
-              </a:rPr>
-              <a:t> Rilevanza sociale: sicurezza stradale</a:t>
-            </a:r>
-            <a:endParaRPr lang="it-IT" sz="1300" noProof="1"/>
-          </a:p>
-        </p:txBody>
-      </p:sp>
-    </p:spTree>
   </p:cSld>
   <p:clrMapOvr>
     <a:masterClrMapping/>
